--- a/03-课件PPT/讲次版/第1章-2-讲次 1-2 · Streaming 流式输出.pptx
+++ b/03-课件PPT/讲次版/第1章-2-讲次 1-2 · Streaming 流式输出.pptx
@@ -4892,8 +4892,8 @@
         </p:nvSpPr>
         <p:spPr>
           <a:xfrm>
-            <a:off x="3714750" y="1905000"/>
-            <a:ext cx="2228850" cy="1047750"/>
+            <a:off x="2524125" y="2000250"/>
+            <a:ext cx="2190750" cy="552450"/>
           </a:xfrm>
           <a:prstGeom prst="roundRect">
             <a:avLst>
@@ -4940,8 +4940,8 @@
         </p:nvSpPr>
         <p:spPr>
           <a:xfrm>
-            <a:off x="3714750" y="1905000"/>
-            <a:ext cx="2228850" cy="1047750"/>
+            <a:off x="2524125" y="2000250"/>
+            <a:ext cx="2190750" cy="552450"/>
           </a:xfrm>
           <a:prstGeom prst="rect">
             <a:avLst/>
@@ -4962,7 +4962,7 @@
             <a:r>
               <a:rPr sz="1300" b="1">
                 <a:solidFill>
-                  <a:srgbClr val="475569"/>
+                  <a:srgbClr val="0B1D3A"/>
                 </a:solidFill>
                 <a:latin typeface="PingFang SC"/>
               </a:rPr>
@@ -4979,8 +4979,8 @@
         </p:nvSpPr>
         <p:spPr>
           <a:xfrm>
-            <a:off x="6096000" y="1905000"/>
-            <a:ext cx="2228850" cy="1047750"/>
+            <a:off x="7477125" y="2000250"/>
+            <a:ext cx="2190750" cy="552450"/>
           </a:xfrm>
           <a:prstGeom prst="roundRect">
             <a:avLst>
@@ -5027,8 +5027,8 @@
         </p:nvSpPr>
         <p:spPr>
           <a:xfrm>
-            <a:off x="6096000" y="1905000"/>
-            <a:ext cx="2228850" cy="1047750"/>
+            <a:off x="7477125" y="2000250"/>
+            <a:ext cx="2190750" cy="552450"/>
           </a:xfrm>
           <a:prstGeom prst="rect">
             <a:avLst/>
@@ -5049,7 +5049,7 @@
             <a:r>
               <a:rPr sz="1300" b="1">
                 <a:solidFill>
-                  <a:srgbClr val="475569"/>
+                  <a:srgbClr val="0B1D3A"/>
                 </a:solidFill>
                 <a:latin typeface="PingFang SC"/>
               </a:rPr>
@@ -5066,8 +5066,8 @@
         </p:nvSpPr>
         <p:spPr>
           <a:xfrm>
-            <a:off x="3714750" y="3524250"/>
-            <a:ext cx="2228850" cy="1047750"/>
+            <a:off x="2524125" y="3429000"/>
+            <a:ext cx="2190750" cy="552450"/>
           </a:xfrm>
           <a:prstGeom prst="roundRect">
             <a:avLst>
@@ -5114,8 +5114,8 @@
         </p:nvSpPr>
         <p:spPr>
           <a:xfrm>
-            <a:off x="3714750" y="3524250"/>
-            <a:ext cx="2228850" cy="1047750"/>
+            <a:off x="2524125" y="3429000"/>
+            <a:ext cx="2190750" cy="552450"/>
           </a:xfrm>
           <a:prstGeom prst="rect">
             <a:avLst/>
@@ -5136,7 +5136,7 @@
             <a:r>
               <a:rPr sz="1300" b="1">
                 <a:solidFill>
-                  <a:srgbClr val="475569"/>
+                  <a:srgbClr val="0B1D3A"/>
                 </a:solidFill>
                 <a:latin typeface="PingFang SC"/>
               </a:rPr>
@@ -5153,8 +5153,8 @@
         </p:nvSpPr>
         <p:spPr>
           <a:xfrm>
-            <a:off x="6096000" y="3524250"/>
-            <a:ext cx="2228850" cy="1047750"/>
+            <a:off x="7477125" y="3429000"/>
+            <a:ext cx="2190750" cy="552450"/>
           </a:xfrm>
           <a:prstGeom prst="roundRect">
             <a:avLst>
@@ -5199,8 +5199,8 @@
         </p:nvSpPr>
         <p:spPr>
           <a:xfrm>
-            <a:off x="6096000" y="3524250"/>
-            <a:ext cx="2228850" cy="1047750"/>
+            <a:off x="7477125" y="3429000"/>
+            <a:ext cx="2190750" cy="552450"/>
           </a:xfrm>
           <a:prstGeom prst="rect">
             <a:avLst/>
@@ -5238,15 +5238,15 @@
         </p:nvCxnSpPr>
         <p:spPr>
           <a:xfrm>
-            <a:off x="5943600" y="2428875"/>
-            <a:ext cx="152400" cy="0"/>
+            <a:off x="4714875" y="2276475"/>
+            <a:ext cx="2695575" cy="0"/>
           </a:xfrm>
           <a:prstGeom prst="line">
             <a:avLst/>
           </a:prstGeom>
-          <a:ln w="17780">
+          <a:ln w="19050">
             <a:solidFill>
-              <a:srgbClr val="475569"/>
+              <a:srgbClr val="2563EB"/>
             </a:solidFill>
           </a:ln>
         </p:spPr>
@@ -5273,14 +5273,14 @@
         </p:nvSpPr>
         <p:spPr>
           <a:xfrm rot="5400000">
-            <a:off x="6010276" y="2386013"/>
+            <a:off x="7324726" y="2233613"/>
             <a:ext cx="85725" cy="85725"/>
           </a:xfrm>
           <a:prstGeom prst="triangle">
             <a:avLst/>
           </a:prstGeom>
           <a:solidFill>
-            <a:srgbClr val="475569"/>
+            <a:srgbClr val="2563EB"/>
           </a:solidFill>
           <a:ln>
             <a:noFill/>
@@ -5311,14 +5311,62 @@
       </p:sp>
       <p:sp>
         <p:nvSpPr>
-          <p:cNvPr id="15" name="TextBox 14"/>
+          <p:cNvPr id="15" name="Rounded Rectangle 14"/>
+          <p:cNvSpPr/>
+          <p:nvPr/>
+        </p:nvSpPr>
+        <p:spPr>
+          <a:xfrm>
+            <a:off x="5500687" y="2133600"/>
+            <a:ext cx="1123950" cy="285750"/>
+          </a:xfrm>
+          <a:prstGeom prst="roundRect">
+            <a:avLst>
+              <a:gd name="adj" fmla="val 8000"/>
+            </a:avLst>
+          </a:prstGeom>
+          <a:solidFill>
+            <a:srgbClr val="FFFFFF"/>
+          </a:solidFill>
+          <a:ln w="12700">
+            <a:solidFill>
+              <a:srgbClr val="DDE5EE"/>
+            </a:solidFill>
+          </a:ln>
+          <a:effectLst/>
+        </p:spPr>
+        <p:style>
+          <a:lnRef idx="1">
+            <a:schemeClr val="accent1"/>
+          </a:lnRef>
+          <a:fillRef idx="3">
+            <a:schemeClr val="accent1"/>
+          </a:fillRef>
+          <a:effectRef idx="2">
+            <a:schemeClr val="accent1"/>
+          </a:effectRef>
+          <a:fontRef idx="minor">
+            <a:schemeClr val="lt1"/>
+          </a:fontRef>
+        </p:style>
+        <p:txBody>
+          <a:bodyPr rtlCol="0" anchor="ctr"/>
+          <a:lstStyle/>
+          <a:p>
+            <a:pPr algn="ctr"/>
+          </a:p>
+        </p:txBody>
+      </p:sp>
+      <p:sp>
+        <p:nvSpPr>
+          <p:cNvPr id="16" name="TextBox 15"/>
           <p:cNvSpPr txBox="1"/>
           <p:nvPr/>
         </p:nvSpPr>
         <p:spPr>
           <a:xfrm>
-            <a:off x="5162550" y="2105025"/>
-            <a:ext cx="1714500" cy="228600"/>
+            <a:off x="5500687" y="2133600"/>
+            <a:ext cx="1123950" cy="285750"/>
           </a:xfrm>
           <a:prstGeom prst="rect">
             <a:avLst/>
@@ -5337,9 +5385,9 @@
               </a:lnSpc>
             </a:pPr>
             <a:r>
-              <a:rPr sz="900" b="0">
-                <a:solidFill>
-                  <a:srgbClr val="94A3B8"/>
+              <a:rPr sz="1100" b="1">
+                <a:solidFill>
+                  <a:srgbClr val="0B1D3A"/>
                 </a:solidFill>
                 <a:latin typeface="PingFang SC"/>
               </a:rPr>
@@ -5350,21 +5398,21 @@
       </p:sp>
       <p:cxnSp>
         <p:nvCxnSpPr>
-          <p:cNvPr id="16" name="Connector 15"/>
+          <p:cNvPr id="17" name="Connector 16"/>
           <p:cNvCxnSpPr/>
           <p:nvPr/>
         </p:nvCxnSpPr>
         <p:spPr>
           <a:xfrm flipH="1">
-            <a:off x="5943600" y="2428875"/>
-            <a:ext cx="1266825" cy="0"/>
+            <a:off x="4781550" y="2276475"/>
+            <a:ext cx="2695575" cy="0"/>
           </a:xfrm>
           <a:prstGeom prst="line">
             <a:avLst/>
           </a:prstGeom>
-          <a:ln w="17780">
+          <a:ln w="19050">
             <a:solidFill>
-              <a:srgbClr val="475569"/>
+              <a:srgbClr val="F87171"/>
             </a:solidFill>
           </a:ln>
         </p:spPr>
@@ -5385,20 +5433,20 @@
       </p:cxnSp>
       <p:sp>
         <p:nvSpPr>
-          <p:cNvPr id="17" name="Isosceles Triangle 16"/>
+          <p:cNvPr id="18" name="Isosceles Triangle 17"/>
           <p:cNvSpPr/>
           <p:nvPr/>
         </p:nvSpPr>
         <p:spPr>
           <a:xfrm rot="16200000">
-            <a:off x="5943600" y="2386013"/>
+            <a:off x="4781550" y="2233613"/>
             <a:ext cx="85725" cy="85725"/>
           </a:xfrm>
           <a:prstGeom prst="triangle">
             <a:avLst/>
           </a:prstGeom>
           <a:solidFill>
-            <a:srgbClr val="475569"/>
+            <a:srgbClr val="F87171"/>
           </a:solidFill>
           <a:ln>
             <a:noFill/>
@@ -5429,14 +5477,62 @@
       </p:sp>
       <p:sp>
         <p:nvSpPr>
-          <p:cNvPr id="18" name="TextBox 17"/>
+          <p:cNvPr id="19" name="Rounded Rectangle 18"/>
+          <p:cNvSpPr/>
+          <p:nvPr/>
+        </p:nvSpPr>
+        <p:spPr>
+          <a:xfrm>
+            <a:off x="5567362" y="2133600"/>
+            <a:ext cx="1123950" cy="285750"/>
+          </a:xfrm>
+          <a:prstGeom prst="roundRect">
+            <a:avLst>
+              <a:gd name="adj" fmla="val 8000"/>
+            </a:avLst>
+          </a:prstGeom>
+          <a:solidFill>
+            <a:srgbClr val="FFFFFF"/>
+          </a:solidFill>
+          <a:ln w="12700">
+            <a:solidFill>
+              <a:srgbClr val="DDE5EE"/>
+            </a:solidFill>
+          </a:ln>
+          <a:effectLst/>
+        </p:spPr>
+        <p:style>
+          <a:lnRef idx="1">
+            <a:schemeClr val="accent1"/>
+          </a:lnRef>
+          <a:fillRef idx="3">
+            <a:schemeClr val="accent1"/>
+          </a:fillRef>
+          <a:effectRef idx="2">
+            <a:schemeClr val="accent1"/>
+          </a:effectRef>
+          <a:fontRef idx="minor">
+            <a:schemeClr val="lt1"/>
+          </a:fontRef>
+        </p:style>
+        <p:txBody>
+          <a:bodyPr rtlCol="0" anchor="ctr"/>
+          <a:lstStyle/>
+          <a:p>
+            <a:pPr algn="ctr"/>
+          </a:p>
+        </p:txBody>
+      </p:sp>
+      <p:sp>
+        <p:nvSpPr>
+          <p:cNvPr id="20" name="TextBox 19"/>
           <p:cNvSpPr txBox="1"/>
           <p:nvPr/>
         </p:nvSpPr>
         <p:spPr>
           <a:xfrm>
-            <a:off x="5643562" y="2105025"/>
-            <a:ext cx="1714500" cy="228600"/>
+            <a:off x="5567362" y="2133600"/>
+            <a:ext cx="1123950" cy="285750"/>
           </a:xfrm>
           <a:prstGeom prst="rect">
             <a:avLst/>
@@ -5455,9 +5551,9 @@
               </a:lnSpc>
             </a:pPr>
             <a:r>
-              <a:rPr sz="900" b="0">
-                <a:solidFill>
-                  <a:srgbClr val="94A3B8"/>
+              <a:rPr sz="1100" b="1">
+                <a:solidFill>
+                  <a:srgbClr val="0B1D3A"/>
                 </a:solidFill>
                 <a:latin typeface="PingFang SC"/>
               </a:rPr>
@@ -5468,21 +5564,21 @@
       </p:sp>
       <p:cxnSp>
         <p:nvCxnSpPr>
-          <p:cNvPr id="19" name="Connector 18"/>
+          <p:cNvPr id="21" name="Connector 20"/>
           <p:cNvCxnSpPr/>
           <p:nvPr/>
         </p:nvCxnSpPr>
         <p:spPr>
           <a:xfrm>
-            <a:off x="4829175" y="2952750"/>
-            <a:ext cx="0" cy="571500"/>
+            <a:off x="3619500" y="2552700"/>
+            <a:ext cx="0" cy="809625"/>
           </a:xfrm>
           <a:prstGeom prst="line">
             <a:avLst/>
           </a:prstGeom>
-          <a:ln w="17780">
+          <a:ln w="19050">
             <a:solidFill>
-              <a:srgbClr val="475569"/>
+              <a:srgbClr val="2563EB"/>
             </a:solidFill>
           </a:ln>
         </p:spPr>
@@ -5503,20 +5599,20 @@
       </p:cxnSp>
       <p:sp>
         <p:nvSpPr>
-          <p:cNvPr id="20" name="Isosceles Triangle 19"/>
+          <p:cNvPr id="22" name="Isosceles Triangle 21"/>
           <p:cNvSpPr/>
           <p:nvPr/>
         </p:nvSpPr>
         <p:spPr>
           <a:xfrm rot="10800000">
-            <a:off x="4786313" y="3438526"/>
+            <a:off x="3576638" y="3276601"/>
             <a:ext cx="85725" cy="85725"/>
           </a:xfrm>
           <a:prstGeom prst="triangle">
             <a:avLst/>
           </a:prstGeom>
           <a:solidFill>
-            <a:srgbClr val="475569"/>
+            <a:srgbClr val="2563EB"/>
           </a:solidFill>
           <a:ln>
             <a:noFill/>
@@ -5547,14 +5643,62 @@
       </p:sp>
       <p:sp>
         <p:nvSpPr>
-          <p:cNvPr id="21" name="TextBox 20"/>
+          <p:cNvPr id="23" name="Rounded Rectangle 22"/>
+          <p:cNvSpPr/>
+          <p:nvPr/>
+        </p:nvSpPr>
+        <p:spPr>
+          <a:xfrm>
+            <a:off x="2847975" y="2814637"/>
+            <a:ext cx="1543050" cy="285750"/>
+          </a:xfrm>
+          <a:prstGeom prst="roundRect">
+            <a:avLst>
+              <a:gd name="adj" fmla="val 8000"/>
+            </a:avLst>
+          </a:prstGeom>
+          <a:solidFill>
+            <a:srgbClr val="FFFFFF"/>
+          </a:solidFill>
+          <a:ln w="12700">
+            <a:solidFill>
+              <a:srgbClr val="DDE5EE"/>
+            </a:solidFill>
+          </a:ln>
+          <a:effectLst/>
+        </p:spPr>
+        <p:style>
+          <a:lnRef idx="1">
+            <a:schemeClr val="accent1"/>
+          </a:lnRef>
+          <a:fillRef idx="3">
+            <a:schemeClr val="accent1"/>
+          </a:fillRef>
+          <a:effectRef idx="2">
+            <a:schemeClr val="accent1"/>
+          </a:effectRef>
+          <a:fontRef idx="minor">
+            <a:schemeClr val="lt1"/>
+          </a:fontRef>
+        </p:style>
+        <p:txBody>
+          <a:bodyPr rtlCol="0" anchor="ctr"/>
+          <a:lstStyle/>
+          <a:p>
+            <a:pPr algn="ctr"/>
+          </a:p>
+        </p:txBody>
+      </p:sp>
+      <p:sp>
+        <p:nvSpPr>
+          <p:cNvPr id="24" name="TextBox 23"/>
           <p:cNvSpPr txBox="1"/>
           <p:nvPr/>
         </p:nvSpPr>
         <p:spPr>
           <a:xfrm>
-            <a:off x="4452937" y="2105025"/>
-            <a:ext cx="1714500" cy="228600"/>
+            <a:off x="2847975" y="2814637"/>
+            <a:ext cx="1543050" cy="285750"/>
           </a:xfrm>
           <a:prstGeom prst="rect">
             <a:avLst/>
@@ -5573,9 +5717,9 @@
               </a:lnSpc>
             </a:pPr>
             <a:r>
-              <a:rPr sz="900" b="0">
-                <a:solidFill>
-                  <a:srgbClr val="94A3B8"/>
+              <a:rPr sz="1100" b="1">
+                <a:solidFill>
+                  <a:srgbClr val="0B1D3A"/>
                 </a:solidFill>
                 <a:latin typeface="PingFang SC"/>
               </a:rPr>
@@ -5586,23 +5730,25 @@
       </p:sp>
       <p:cxnSp>
         <p:nvCxnSpPr>
-          <p:cNvPr id="22" name="Connector 21"/>
+          <p:cNvPr id="25" name="Connector 24"/>
           <p:cNvCxnSpPr/>
           <p:nvPr/>
         </p:nvCxnSpPr>
         <p:spPr>
-          <a:xfrm>
-            <a:off x="5943600" y="2428875"/>
-            <a:ext cx="152400" cy="1619250"/>
+          <a:xfrm flipV="1">
+            <a:off x="3619500" y="1562100"/>
+            <a:ext cx="0" cy="419100"/>
           </a:xfrm>
           <a:prstGeom prst="line">
             <a:avLst/>
           </a:prstGeom>
-          <a:ln w="17780">
+          <a:ln w="12700">
             <a:solidFill>
-              <a:srgbClr val="475569"/>
+              <a:srgbClr val="DDE5EE"/>
             </a:solidFill>
-          </a:ln>
+            <a:prstDash val="dash"/>
+          </a:ln>
+          <a:effectLst/>
         </p:spPr>
         <p:style>
           <a:lnRef idx="2">
@@ -5619,22 +5765,131 @@
           </a:fontRef>
         </p:style>
       </p:cxnSp>
-      <p:sp>
-        <p:nvSpPr>
-          <p:cNvPr id="23" name="Isosceles Triangle 22"/>
-          <p:cNvSpPr/>
-          <p:nvPr/>
-        </p:nvSpPr>
-        <p:spPr>
-          <a:xfrm rot="10477398">
-            <a:off x="6049122" y="3962590"/>
+      <p:cxnSp>
+        <p:nvCxnSpPr>
+          <p:cNvPr id="26" name="Connector 25"/>
+          <p:cNvCxnSpPr/>
+          <p:nvPr/>
+        </p:nvCxnSpPr>
+        <p:spPr>
+          <a:xfrm>
+            <a:off x="3619500" y="1562100"/>
+            <a:ext cx="4953000" cy="0"/>
+          </a:xfrm>
+          <a:prstGeom prst="line">
+            <a:avLst/>
+          </a:prstGeom>
+          <a:ln w="12700">
+            <a:solidFill>
+              <a:srgbClr val="DDE5EE"/>
+            </a:solidFill>
+            <a:prstDash val="dash"/>
+          </a:ln>
+          <a:effectLst/>
+        </p:spPr>
+        <p:style>
+          <a:lnRef idx="2">
+            <a:schemeClr val="accent1"/>
+          </a:lnRef>
+          <a:fillRef idx="0">
+            <a:schemeClr val="accent1"/>
+          </a:fillRef>
+          <a:effectRef idx="1">
+            <a:schemeClr val="accent1"/>
+          </a:effectRef>
+          <a:fontRef idx="minor">
+            <a:schemeClr val="tx1"/>
+          </a:fontRef>
+        </p:style>
+      </p:cxnSp>
+      <p:cxnSp>
+        <p:nvCxnSpPr>
+          <p:cNvPr id="27" name="Connector 26"/>
+          <p:cNvCxnSpPr/>
+          <p:nvPr/>
+        </p:nvCxnSpPr>
+        <p:spPr>
+          <a:xfrm>
+            <a:off x="8572500" y="1562100"/>
+            <a:ext cx="0" cy="1781175"/>
+          </a:xfrm>
+          <a:prstGeom prst="line">
+            <a:avLst/>
+          </a:prstGeom>
+          <a:ln w="12700">
+            <a:solidFill>
+              <a:srgbClr val="DDE5EE"/>
+            </a:solidFill>
+            <a:prstDash val="dash"/>
+          </a:ln>
+          <a:effectLst/>
+        </p:spPr>
+        <p:style>
+          <a:lnRef idx="2">
+            <a:schemeClr val="accent1"/>
+          </a:lnRef>
+          <a:fillRef idx="0">
+            <a:schemeClr val="accent1"/>
+          </a:fillRef>
+          <a:effectRef idx="1">
+            <a:schemeClr val="accent1"/>
+          </a:effectRef>
+          <a:fontRef idx="minor">
+            <a:schemeClr val="tx1"/>
+          </a:fontRef>
+        </p:style>
+      </p:cxnSp>
+      <p:cxnSp>
+        <p:nvCxnSpPr>
+          <p:cNvPr id="28" name="Connector 27"/>
+          <p:cNvCxnSpPr/>
+          <p:nvPr/>
+        </p:nvCxnSpPr>
+        <p:spPr>
+          <a:xfrm>
+            <a:off x="8572500" y="2552700"/>
+            <a:ext cx="0" cy="809625"/>
+          </a:xfrm>
+          <a:prstGeom prst="line">
+            <a:avLst/>
+          </a:prstGeom>
+          <a:ln w="19050">
+            <a:solidFill>
+              <a:srgbClr val="2563EB"/>
+            </a:solidFill>
+          </a:ln>
+        </p:spPr>
+        <p:style>
+          <a:lnRef idx="2">
+            <a:schemeClr val="accent1"/>
+          </a:lnRef>
+          <a:fillRef idx="0">
+            <a:schemeClr val="accent1"/>
+          </a:fillRef>
+          <a:effectRef idx="1">
+            <a:schemeClr val="accent1"/>
+          </a:effectRef>
+          <a:fontRef idx="minor">
+            <a:schemeClr val="tx1"/>
+          </a:fontRef>
+        </p:style>
+      </p:cxnSp>
+      <p:sp>
+        <p:nvSpPr>
+          <p:cNvPr id="29" name="Isosceles Triangle 28"/>
+          <p:cNvSpPr/>
+          <p:nvPr/>
+        </p:nvSpPr>
+        <p:spPr>
+          <a:xfrm rot="10800000">
+            <a:off x="8529638" y="3276601"/>
             <a:ext cx="85725" cy="85725"/>
           </a:xfrm>
           <a:prstGeom prst="triangle">
             <a:avLst/>
           </a:prstGeom>
           <a:solidFill>
-            <a:srgbClr val="475569"/>
+            <a:srgbClr val="2563EB"/>
           </a:solidFill>
           <a:ln>
             <a:noFill/>
@@ -5665,14 +5920,62 @@
       </p:sp>
       <p:sp>
         <p:nvSpPr>
-          <p:cNvPr id="24" name="TextBox 23"/>
+          <p:cNvPr id="30" name="Rounded Rectangle 29"/>
+          <p:cNvSpPr/>
+          <p:nvPr/>
+        </p:nvSpPr>
+        <p:spPr>
+          <a:xfrm>
+            <a:off x="8220075" y="2814637"/>
+            <a:ext cx="704850" cy="285750"/>
+          </a:xfrm>
+          <a:prstGeom prst="roundRect">
+            <a:avLst>
+              <a:gd name="adj" fmla="val 8000"/>
+            </a:avLst>
+          </a:prstGeom>
+          <a:solidFill>
+            <a:srgbClr val="FFFFFF"/>
+          </a:solidFill>
+          <a:ln w="12700">
+            <a:solidFill>
+              <a:srgbClr val="DDE5EE"/>
+            </a:solidFill>
+          </a:ln>
+          <a:effectLst/>
+        </p:spPr>
+        <p:style>
+          <a:lnRef idx="1">
+            <a:schemeClr val="accent1"/>
+          </a:lnRef>
+          <a:fillRef idx="3">
+            <a:schemeClr val="accent1"/>
+          </a:fillRef>
+          <a:effectRef idx="2">
+            <a:schemeClr val="accent1"/>
+          </a:effectRef>
+          <a:fontRef idx="minor">
+            <a:schemeClr val="lt1"/>
+          </a:fontRef>
+        </p:style>
+        <p:txBody>
+          <a:bodyPr rtlCol="0" anchor="ctr"/>
+          <a:lstStyle/>
+          <a:p>
+            <a:pPr algn="ctr"/>
+          </a:p>
+        </p:txBody>
+      </p:sp>
+      <p:sp>
+        <p:nvSpPr>
+          <p:cNvPr id="31" name="TextBox 30"/>
           <p:cNvSpPr txBox="1"/>
           <p:nvPr/>
         </p:nvSpPr>
         <p:spPr>
           <a:xfrm>
-            <a:off x="5162550" y="2105025"/>
-            <a:ext cx="1714500" cy="228600"/>
+            <a:off x="8220075" y="2814637"/>
+            <a:ext cx="704850" cy="285750"/>
           </a:xfrm>
           <a:prstGeom prst="rect">
             <a:avLst/>
@@ -5691,138 +5994,20 @@
               </a:lnSpc>
             </a:pPr>
             <a:r>
-              <a:rPr sz="900" b="0">
-                <a:solidFill>
-                  <a:srgbClr val="94A3B8"/>
+              <a:rPr sz="1100" b="1">
+                <a:solidFill>
+                  <a:srgbClr val="0B1D3A"/>
                 </a:solidFill>
                 <a:latin typeface="PingFang SC"/>
               </a:rPr>
-              <a:t>用户停止</a:t>
-            </a:r>
-          </a:p>
-        </p:txBody>
-      </p:sp>
-      <p:cxnSp>
-        <p:nvCxnSpPr>
-          <p:cNvPr id="25" name="Connector 24"/>
-          <p:cNvCxnSpPr/>
-          <p:nvPr/>
-        </p:nvCxnSpPr>
-        <p:spPr>
-          <a:xfrm>
-            <a:off x="7210425" y="2952750"/>
-            <a:ext cx="0" cy="571500"/>
-          </a:xfrm>
-          <a:prstGeom prst="line">
-            <a:avLst/>
-          </a:prstGeom>
-          <a:ln w="17780">
-            <a:solidFill>
-              <a:srgbClr val="475569"/>
-            </a:solidFill>
-          </a:ln>
-        </p:spPr>
-        <p:style>
-          <a:lnRef idx="2">
-            <a:schemeClr val="accent1"/>
-          </a:lnRef>
-          <a:fillRef idx="0">
-            <a:schemeClr val="accent1"/>
-          </a:fillRef>
-          <a:effectRef idx="1">
-            <a:schemeClr val="accent1"/>
-          </a:effectRef>
-          <a:fontRef idx="minor">
-            <a:schemeClr val="tx1"/>
-          </a:fontRef>
-        </p:style>
-      </p:cxnSp>
-      <p:sp>
-        <p:nvSpPr>
-          <p:cNvPr id="26" name="Isosceles Triangle 25"/>
-          <p:cNvSpPr/>
-          <p:nvPr/>
-        </p:nvSpPr>
-        <p:spPr>
-          <a:xfrm rot="10800000">
-            <a:off x="7167563" y="3438526"/>
-            <a:ext cx="85725" cy="85725"/>
-          </a:xfrm>
-          <a:prstGeom prst="triangle">
-            <a:avLst/>
-          </a:prstGeom>
-          <a:solidFill>
-            <a:srgbClr val="475569"/>
-          </a:solidFill>
-          <a:ln>
-            <a:noFill/>
-          </a:ln>
-          <a:effectLst/>
-        </p:spPr>
-        <p:style>
-          <a:lnRef idx="1">
-            <a:schemeClr val="accent1"/>
-          </a:lnRef>
-          <a:fillRef idx="3">
-            <a:schemeClr val="accent1"/>
-          </a:fillRef>
-          <a:effectRef idx="2">
-            <a:schemeClr val="accent1"/>
-          </a:effectRef>
-          <a:fontRef idx="minor">
-            <a:schemeClr val="lt1"/>
-          </a:fontRef>
-        </p:style>
-        <p:txBody>
-          <a:bodyPr rtlCol="0" anchor="ctr"/>
-          <a:lstStyle/>
-          <a:p>
-            <a:pPr algn="ctr"/>
-          </a:p>
-        </p:txBody>
-      </p:sp>
-      <p:sp>
-        <p:nvSpPr>
-          <p:cNvPr id="27" name="TextBox 26"/>
-          <p:cNvSpPr txBox="1"/>
-          <p:nvPr/>
-        </p:nvSpPr>
-        <p:spPr>
-          <a:xfrm>
-            <a:off x="6834187" y="2105025"/>
-            <a:ext cx="1714500" cy="228600"/>
-          </a:xfrm>
-          <a:prstGeom prst="rect">
-            <a:avLst/>
-          </a:prstGeom>
-          <a:noFill/>
-        </p:spPr>
-        <p:txBody>
-          <a:bodyPr wrap="square" anchor="ctr">
-            <a:spAutoFit/>
-          </a:bodyPr>
-          <a:lstStyle/>
-          <a:p>
-            <a:pPr algn="ctr">
-              <a:lnSpc>
-                <a:spcPct val="100000"/>
-              </a:lnSpc>
-            </a:pPr>
-            <a:r>
-              <a:rPr sz="900" b="0">
-                <a:solidFill>
-                  <a:srgbClr val="94A3B8"/>
-                </a:solidFill>
-                <a:latin typeface="PingFang SC"/>
-              </a:rPr>
-              <a:t>超时|已生成部分保留+计量</a:t>
-            </a:r>
-          </a:p>
-        </p:txBody>
-      </p:sp>
-      <p:sp>
-        <p:nvSpPr>
-          <p:cNvPr id="28" name="TextBox 27"/>
+              <a:t>超时</a:t>
+            </a:r>
+          </a:p>
+        </p:txBody>
+      </p:sp>
+      <p:sp>
+        <p:nvSpPr>
+          <p:cNvPr id="32" name="TextBox 31"/>
           <p:cNvSpPr txBox="1"/>
           <p:nvPr/>
         </p:nvSpPr>
@@ -5861,7 +6046,7 @@
       </p:sp>
       <p:sp>
         <p:nvSpPr>
-          <p:cNvPr id="29" name="TextBox 28"/>
+          <p:cNvPr id="33" name="TextBox 32"/>
           <p:cNvSpPr txBox="1"/>
           <p:nvPr/>
         </p:nvSpPr>
@@ -16183,14 +16368,230 @@
       </p:sp>
       <p:sp>
         <p:nvSpPr>
-          <p:cNvPr id="5" name="TextBox 4"/>
+          <p:cNvPr id="5" name="Rounded Rectangle 4"/>
+          <p:cNvSpPr/>
+          <p:nvPr/>
+        </p:nvSpPr>
+        <p:spPr>
+          <a:xfrm>
+            <a:off x="857250" y="2667000"/>
+            <a:ext cx="10477500" cy="1143000"/>
+          </a:xfrm>
+          <a:prstGeom prst="roundRect">
+            <a:avLst>
+              <a:gd name="adj" fmla="val 8000"/>
+            </a:avLst>
+          </a:prstGeom>
+          <a:solidFill>
+            <a:srgbClr val="FFFFFF"/>
+          </a:solidFill>
+          <a:ln w="12700">
+            <a:solidFill>
+              <a:srgbClr val="2563EB"/>
+            </a:solidFill>
+          </a:ln>
+          <a:effectLst/>
+        </p:spPr>
+        <p:style>
+          <a:lnRef idx="1">
+            <a:schemeClr val="accent1"/>
+          </a:lnRef>
+          <a:fillRef idx="3">
+            <a:schemeClr val="accent1"/>
+          </a:fillRef>
+          <a:effectRef idx="2">
+            <a:schemeClr val="accent1"/>
+          </a:effectRef>
+          <a:fontRef idx="minor">
+            <a:schemeClr val="lt1"/>
+          </a:fontRef>
+        </p:style>
+        <p:txBody>
+          <a:bodyPr rtlCol="0" anchor="ctr"/>
+          <a:lstStyle/>
+          <a:p>
+            <a:pPr algn="ctr"/>
+          </a:p>
+        </p:txBody>
+      </p:sp>
+      <p:sp>
+        <p:nvSpPr>
+          <p:cNvPr id="6" name="Rectangle 5"/>
+          <p:cNvSpPr/>
+          <p:nvPr/>
+        </p:nvSpPr>
+        <p:spPr>
+          <a:xfrm>
+            <a:off x="857250" y="2667000"/>
+            <a:ext cx="10477500" cy="57150"/>
+          </a:xfrm>
+          <a:prstGeom prst="rect">
+            <a:avLst/>
+          </a:prstGeom>
+          <a:solidFill>
+            <a:srgbClr val="2563EB"/>
+          </a:solidFill>
+          <a:ln>
+            <a:noFill/>
+          </a:ln>
+          <a:effectLst/>
+        </p:spPr>
+        <p:style>
+          <a:lnRef idx="1">
+            <a:schemeClr val="accent1"/>
+          </a:lnRef>
+          <a:fillRef idx="3">
+            <a:schemeClr val="accent1"/>
+          </a:fillRef>
+          <a:effectRef idx="2">
+            <a:schemeClr val="accent1"/>
+          </a:effectRef>
+          <a:fontRef idx="minor">
+            <a:schemeClr val="lt1"/>
+          </a:fontRef>
+        </p:style>
+        <p:txBody>
+          <a:bodyPr rtlCol="0" anchor="ctr"/>
+          <a:lstStyle/>
+          <a:p>
+            <a:pPr algn="ctr"/>
+          </a:p>
+        </p:txBody>
+      </p:sp>
+      <p:sp>
+        <p:nvSpPr>
+          <p:cNvPr id="7" name="Rounded Rectangle 6"/>
+          <p:cNvSpPr/>
+          <p:nvPr/>
+        </p:nvSpPr>
+        <p:spPr>
+          <a:xfrm>
+            <a:off x="5953125" y="2524125"/>
+            <a:ext cx="285750" cy="285750"/>
+          </a:xfrm>
+          <a:prstGeom prst="roundRect">
+            <a:avLst>
+              <a:gd name="adj" fmla="val 8000"/>
+            </a:avLst>
+          </a:prstGeom>
+          <a:solidFill>
+            <a:srgbClr val="2563EB"/>
+          </a:solidFill>
+          <a:ln>
+            <a:noFill/>
+          </a:ln>
+          <a:effectLst/>
+        </p:spPr>
+        <p:style>
+          <a:lnRef idx="1">
+            <a:schemeClr val="accent1"/>
+          </a:lnRef>
+          <a:fillRef idx="3">
+            <a:schemeClr val="accent1"/>
+          </a:fillRef>
+          <a:effectRef idx="2">
+            <a:schemeClr val="accent1"/>
+          </a:effectRef>
+          <a:fontRef idx="minor">
+            <a:schemeClr val="lt1"/>
+          </a:fontRef>
+        </p:style>
+        <p:txBody>
+          <a:bodyPr rtlCol="0" anchor="ctr"/>
+          <a:lstStyle/>
+          <a:p>
+            <a:pPr algn="ctr"/>
+          </a:p>
+        </p:txBody>
+      </p:sp>
+      <p:sp>
+        <p:nvSpPr>
+          <p:cNvPr id="8" name="TextBox 7"/>
           <p:cNvSpPr txBox="1"/>
           <p:nvPr/>
         </p:nvSpPr>
         <p:spPr>
           <a:xfrm>
-            <a:off x="9334500" y="0"/>
-            <a:ext cx="2667000" cy="704850"/>
+            <a:off x="5953125" y="2514600"/>
+            <a:ext cx="285750" cy="285750"/>
+          </a:xfrm>
+          <a:prstGeom prst="rect">
+            <a:avLst/>
+          </a:prstGeom>
+          <a:noFill/>
+        </p:spPr>
+        <p:txBody>
+          <a:bodyPr wrap="square" anchor="ctr">
+            <a:spAutoFit/>
+          </a:bodyPr>
+          <a:lstStyle/>
+          <a:p>
+            <a:pPr algn="ctr">
+              <a:lnSpc>
+                <a:spcPct val="100000"/>
+              </a:lnSpc>
+            </a:pPr>
+            <a:r>
+              <a:rPr sz="1300" b="1">
+                <a:solidFill>
+                  <a:srgbClr val="FFFFFF"/>
+                </a:solidFill>
+                <a:latin typeface="PingFang SC"/>
+              </a:rPr>
+              <a:t>1</a:t>
+            </a:r>
+          </a:p>
+        </p:txBody>
+      </p:sp>
+      <p:sp>
+        <p:nvSpPr>
+          <p:cNvPr id="9" name="TextBox 8"/>
+          <p:cNvSpPr txBox="1"/>
+          <p:nvPr/>
+        </p:nvSpPr>
+        <p:spPr>
+          <a:xfrm>
+            <a:off x="933450" y="2800350"/>
+            <a:ext cx="10325100" cy="952500"/>
+          </a:xfrm>
+          <a:prstGeom prst="rect">
+            <a:avLst/>
+          </a:prstGeom>
+          <a:noFill/>
+        </p:spPr>
+        <p:txBody>
+          <a:bodyPr wrap="square" anchor="ctr">
+            <a:spAutoFit/>
+          </a:bodyPr>
+          <a:lstStyle/>
+          <a:p>
+            <a:pPr algn="ctr">
+              <a:lnSpc>
+                <a:spcPct val="100000"/>
+              </a:lnSpc>
+            </a:pPr>
+            <a:r>
+              <a:rPr sz="1200" b="1">
+                <a:solidFill>
+                  <a:srgbClr val="475569"/>
+                </a:solidFill>
+                <a:latin typeface="PingFang SC"/>
+              </a:rPr>
+              <a:t>note=跨 chunk 半帧是常见坑:必须缓冲</a:t>
+            </a:r>
+          </a:p>
+        </p:txBody>
+      </p:sp>
+      <p:sp>
+        <p:nvSpPr>
+          <p:cNvPr id="10" name="TextBox 9"/>
+          <p:cNvSpPr txBox="1"/>
+          <p:nvPr/>
+        </p:nvSpPr>
+        <p:spPr>
+          <a:xfrm>
+            <a:off x="10287000" y="6534150"/>
+            <a:ext cx="1619250" cy="266700"/>
           </a:xfrm>
           <a:prstGeom prst="rect">
             <a:avLst/>
@@ -16209,261 +16610,6 @@
               </a:lnSpc>
             </a:pPr>
             <a:r>
-              <a:rPr sz="1100" b="0">
-                <a:solidFill>
-                  <a:srgbClr val="94A3B8"/>
-                </a:solidFill>
-                <a:latin typeface="PingFang SC"/>
-              </a:rPr>
-              <a:t>末帧 usage + [DONE]</a:t>
-            </a:r>
-          </a:p>
-        </p:txBody>
-      </p:sp>
-      <p:sp>
-        <p:nvSpPr>
-          <p:cNvPr id="6" name="Rounded Rectangle 5"/>
-          <p:cNvSpPr/>
-          <p:nvPr/>
-        </p:nvSpPr>
-        <p:spPr>
-          <a:xfrm>
-            <a:off x="857250" y="2667000"/>
-            <a:ext cx="10477500" cy="1143000"/>
-          </a:xfrm>
-          <a:prstGeom prst="roundRect">
-            <a:avLst>
-              <a:gd name="adj" fmla="val 8000"/>
-            </a:avLst>
-          </a:prstGeom>
-          <a:solidFill>
-            <a:srgbClr val="FFFFFF"/>
-          </a:solidFill>
-          <a:ln w="12700">
-            <a:solidFill>
-              <a:srgbClr val="2563EB"/>
-            </a:solidFill>
-          </a:ln>
-          <a:effectLst/>
-        </p:spPr>
-        <p:style>
-          <a:lnRef idx="1">
-            <a:schemeClr val="accent1"/>
-          </a:lnRef>
-          <a:fillRef idx="3">
-            <a:schemeClr val="accent1"/>
-          </a:fillRef>
-          <a:effectRef idx="2">
-            <a:schemeClr val="accent1"/>
-          </a:effectRef>
-          <a:fontRef idx="minor">
-            <a:schemeClr val="lt1"/>
-          </a:fontRef>
-        </p:style>
-        <p:txBody>
-          <a:bodyPr rtlCol="0" anchor="ctr"/>
-          <a:lstStyle/>
-          <a:p>
-            <a:pPr algn="ctr"/>
-          </a:p>
-        </p:txBody>
-      </p:sp>
-      <p:sp>
-        <p:nvSpPr>
-          <p:cNvPr id="7" name="Rectangle 6"/>
-          <p:cNvSpPr/>
-          <p:nvPr/>
-        </p:nvSpPr>
-        <p:spPr>
-          <a:xfrm>
-            <a:off x="857250" y="2667000"/>
-            <a:ext cx="10477500" cy="57150"/>
-          </a:xfrm>
-          <a:prstGeom prst="rect">
-            <a:avLst/>
-          </a:prstGeom>
-          <a:solidFill>
-            <a:srgbClr val="2563EB"/>
-          </a:solidFill>
-          <a:ln>
-            <a:noFill/>
-          </a:ln>
-          <a:effectLst/>
-        </p:spPr>
-        <p:style>
-          <a:lnRef idx="1">
-            <a:schemeClr val="accent1"/>
-          </a:lnRef>
-          <a:fillRef idx="3">
-            <a:schemeClr val="accent1"/>
-          </a:fillRef>
-          <a:effectRef idx="2">
-            <a:schemeClr val="accent1"/>
-          </a:effectRef>
-          <a:fontRef idx="minor">
-            <a:schemeClr val="lt1"/>
-          </a:fontRef>
-        </p:style>
-        <p:txBody>
-          <a:bodyPr rtlCol="0" anchor="ctr"/>
-          <a:lstStyle/>
-          <a:p>
-            <a:pPr algn="ctr"/>
-          </a:p>
-        </p:txBody>
-      </p:sp>
-      <p:sp>
-        <p:nvSpPr>
-          <p:cNvPr id="8" name="Rounded Rectangle 7"/>
-          <p:cNvSpPr/>
-          <p:nvPr/>
-        </p:nvSpPr>
-        <p:spPr>
-          <a:xfrm>
-            <a:off x="5953125" y="2524125"/>
-            <a:ext cx="285750" cy="285750"/>
-          </a:xfrm>
-          <a:prstGeom prst="roundRect">
-            <a:avLst>
-              <a:gd name="adj" fmla="val 8000"/>
-            </a:avLst>
-          </a:prstGeom>
-          <a:solidFill>
-            <a:srgbClr val="2563EB"/>
-          </a:solidFill>
-          <a:ln>
-            <a:noFill/>
-          </a:ln>
-          <a:effectLst/>
-        </p:spPr>
-        <p:style>
-          <a:lnRef idx="1">
-            <a:schemeClr val="accent1"/>
-          </a:lnRef>
-          <a:fillRef idx="3">
-            <a:schemeClr val="accent1"/>
-          </a:fillRef>
-          <a:effectRef idx="2">
-            <a:schemeClr val="accent1"/>
-          </a:effectRef>
-          <a:fontRef idx="minor">
-            <a:schemeClr val="lt1"/>
-          </a:fontRef>
-        </p:style>
-        <p:txBody>
-          <a:bodyPr rtlCol="0" anchor="ctr"/>
-          <a:lstStyle/>
-          <a:p>
-            <a:pPr algn="ctr"/>
-          </a:p>
-        </p:txBody>
-      </p:sp>
-      <p:sp>
-        <p:nvSpPr>
-          <p:cNvPr id="9" name="TextBox 8"/>
-          <p:cNvSpPr txBox="1"/>
-          <p:nvPr/>
-        </p:nvSpPr>
-        <p:spPr>
-          <a:xfrm>
-            <a:off x="5953125" y="2514600"/>
-            <a:ext cx="285750" cy="285750"/>
-          </a:xfrm>
-          <a:prstGeom prst="rect">
-            <a:avLst/>
-          </a:prstGeom>
-          <a:noFill/>
-        </p:spPr>
-        <p:txBody>
-          <a:bodyPr wrap="square" anchor="ctr">
-            <a:spAutoFit/>
-          </a:bodyPr>
-          <a:lstStyle/>
-          <a:p>
-            <a:pPr algn="ctr">
-              <a:lnSpc>
-                <a:spcPct val="100000"/>
-              </a:lnSpc>
-            </a:pPr>
-            <a:r>
-              <a:rPr sz="1300" b="1">
-                <a:solidFill>
-                  <a:srgbClr val="FFFFFF"/>
-                </a:solidFill>
-                <a:latin typeface="PingFang SC"/>
-              </a:rPr>
-              <a:t>1</a:t>
-            </a:r>
-          </a:p>
-        </p:txBody>
-      </p:sp>
-      <p:sp>
-        <p:nvSpPr>
-          <p:cNvPr id="10" name="TextBox 9"/>
-          <p:cNvSpPr txBox="1"/>
-          <p:nvPr/>
-        </p:nvSpPr>
-        <p:spPr>
-          <a:xfrm>
-            <a:off x="933450" y="2800350"/>
-            <a:ext cx="10325100" cy="952500"/>
-          </a:xfrm>
-          <a:prstGeom prst="rect">
-            <a:avLst/>
-          </a:prstGeom>
-          <a:noFill/>
-        </p:spPr>
-        <p:txBody>
-          <a:bodyPr wrap="square" anchor="ctr">
-            <a:spAutoFit/>
-          </a:bodyPr>
-          <a:lstStyle/>
-          <a:p>
-            <a:pPr algn="ctr">
-              <a:lnSpc>
-                <a:spcPct val="100000"/>
-              </a:lnSpc>
-            </a:pPr>
-            <a:r>
-              <a:rPr sz="1200" b="1">
-                <a:solidFill>
-                  <a:srgbClr val="475569"/>
-                </a:solidFill>
-                <a:latin typeface="PingFang SC"/>
-              </a:rPr>
-              <a:t>note=跨 chunk 半帧是常见坑:必须缓冲|末帧 usage + [DONE]</a:t>
-            </a:r>
-          </a:p>
-        </p:txBody>
-      </p:sp>
-      <p:sp>
-        <p:nvSpPr>
-          <p:cNvPr id="11" name="TextBox 10"/>
-          <p:cNvSpPr txBox="1"/>
-          <p:nvPr/>
-        </p:nvSpPr>
-        <p:spPr>
-          <a:xfrm>
-            <a:off x="10287000" y="6534150"/>
-            <a:ext cx="1619250" cy="266700"/>
-          </a:xfrm>
-          <a:prstGeom prst="rect">
-            <a:avLst/>
-          </a:prstGeom>
-          <a:noFill/>
-        </p:spPr>
-        <p:txBody>
-          <a:bodyPr wrap="square" anchor="ctr">
-            <a:spAutoFit/>
-          </a:bodyPr>
-          <a:lstStyle/>
-          <a:p>
-            <a:pPr algn="r">
-              <a:lnSpc>
-                <a:spcPct val="100000"/>
-              </a:lnSpc>
-            </a:pPr>
-            <a:r>
               <a:rPr sz="900" b="0">
                 <a:solidFill>
                   <a:srgbClr val="94A3B8"/>
@@ -16477,7 +16623,7 @@
       </p:sp>
       <p:sp>
         <p:nvSpPr>
-          <p:cNvPr id="12" name="TextBox 11"/>
+          <p:cNvPr id="11" name="TextBox 10"/>
           <p:cNvSpPr txBox="1"/>
           <p:nvPr/>
         </p:nvSpPr>
@@ -19512,7 +19658,7 @@
                 </a:solidFill>
                 <a:latin typeface="PingFang SC"/>
               </a:rPr>
-              <a:t>5. 剩余帧+usage|重连需幂等:防重复生成</a:t>
+              <a:t>5. 剩余帧+usage</a:t>
             </a:r>
           </a:p>
         </p:txBody>
@@ -23783,7 +23929,7 @@
         <p:spPr>
           <a:xfrm>
             <a:off x="365760" y="762000"/>
-            <a:ext cx="11460480" cy="5339541"/>
+            <a:ext cx="11460480" cy="5144192"/>
           </a:xfrm>
           <a:prstGeom prst="rect">
             <a:avLst/>
@@ -27470,14 +27616,416 @@
       </p:sp>
       <p:sp>
         <p:nvSpPr>
-          <p:cNvPr id="5" name="TextBox 4"/>
+          <p:cNvPr id="5" name="Rounded Rectangle 4"/>
+          <p:cNvSpPr/>
+          <p:nvPr/>
+        </p:nvSpPr>
+        <p:spPr>
+          <a:xfrm>
+            <a:off x="1333500" y="1047750"/>
+            <a:ext cx="9525000" cy="3238500"/>
+          </a:xfrm>
+          <a:prstGeom prst="roundRect">
+            <a:avLst>
+              <a:gd name="adj" fmla="val 8000"/>
+            </a:avLst>
+          </a:prstGeom>
+          <a:solidFill>
+            <a:srgbClr val="0D1117"/>
+          </a:solidFill>
+          <a:ln>
+            <a:noFill/>
+          </a:ln>
+          <a:effectLst/>
+        </p:spPr>
+        <p:style>
+          <a:lnRef idx="1">
+            <a:schemeClr val="accent1"/>
+          </a:lnRef>
+          <a:fillRef idx="3">
+            <a:schemeClr val="accent1"/>
+          </a:fillRef>
+          <a:effectRef idx="2">
+            <a:schemeClr val="accent1"/>
+          </a:effectRef>
+          <a:fontRef idx="minor">
+            <a:schemeClr val="lt1"/>
+          </a:fontRef>
+        </p:style>
+        <p:txBody>
+          <a:bodyPr rtlCol="0" anchor="ctr"/>
+          <a:lstStyle/>
+          <a:p>
+            <a:pPr algn="ctr"/>
+          </a:p>
+        </p:txBody>
+      </p:sp>
+      <p:sp>
+        <p:nvSpPr>
+          <p:cNvPr id="6" name="Rectangle 5"/>
+          <p:cNvSpPr/>
+          <p:nvPr/>
+        </p:nvSpPr>
+        <p:spPr>
+          <a:xfrm>
+            <a:off x="1333500" y="1047750"/>
+            <a:ext cx="9525000" cy="381000"/>
+          </a:xfrm>
+          <a:prstGeom prst="rect">
+            <a:avLst/>
+          </a:prstGeom>
+          <a:solidFill>
+            <a:srgbClr val="1F2937"/>
+          </a:solidFill>
+          <a:ln>
+            <a:noFill/>
+          </a:ln>
+          <a:effectLst/>
+        </p:spPr>
+        <p:style>
+          <a:lnRef idx="1">
+            <a:schemeClr val="accent1"/>
+          </a:lnRef>
+          <a:fillRef idx="3">
+            <a:schemeClr val="accent1"/>
+          </a:fillRef>
+          <a:effectRef idx="2">
+            <a:schemeClr val="accent1"/>
+          </a:effectRef>
+          <a:fontRef idx="minor">
+            <a:schemeClr val="lt1"/>
+          </a:fontRef>
+        </p:style>
+        <p:txBody>
+          <a:bodyPr rtlCol="0" anchor="ctr"/>
+          <a:lstStyle/>
+          <a:p>
+            <a:pPr algn="ctr"/>
+          </a:p>
+        </p:txBody>
+      </p:sp>
+      <p:sp>
+        <p:nvSpPr>
+          <p:cNvPr id="7" name="Rounded Rectangle 6"/>
+          <p:cNvSpPr/>
+          <p:nvPr/>
+        </p:nvSpPr>
+        <p:spPr>
+          <a:xfrm>
+            <a:off x="1504950" y="1181100"/>
+            <a:ext cx="123825" cy="123825"/>
+          </a:xfrm>
+          <a:prstGeom prst="roundRect">
+            <a:avLst>
+              <a:gd name="adj" fmla="val 8000"/>
+            </a:avLst>
+          </a:prstGeom>
+          <a:solidFill>
+            <a:srgbClr val="F87171"/>
+          </a:solidFill>
+          <a:ln>
+            <a:noFill/>
+          </a:ln>
+          <a:effectLst/>
+        </p:spPr>
+        <p:style>
+          <a:lnRef idx="1">
+            <a:schemeClr val="accent1"/>
+          </a:lnRef>
+          <a:fillRef idx="3">
+            <a:schemeClr val="accent1"/>
+          </a:fillRef>
+          <a:effectRef idx="2">
+            <a:schemeClr val="accent1"/>
+          </a:effectRef>
+          <a:fontRef idx="minor">
+            <a:schemeClr val="lt1"/>
+          </a:fontRef>
+        </p:style>
+        <p:txBody>
+          <a:bodyPr rtlCol="0" anchor="ctr"/>
+          <a:lstStyle/>
+          <a:p>
+            <a:pPr algn="ctr"/>
+          </a:p>
+        </p:txBody>
+      </p:sp>
+      <p:sp>
+        <p:nvSpPr>
+          <p:cNvPr id="8" name="Rounded Rectangle 7"/>
+          <p:cNvSpPr/>
+          <p:nvPr/>
+        </p:nvSpPr>
+        <p:spPr>
+          <a:xfrm>
+            <a:off x="1752600" y="1181100"/>
+            <a:ext cx="123825" cy="123825"/>
+          </a:xfrm>
+          <a:prstGeom prst="roundRect">
+            <a:avLst>
+              <a:gd name="adj" fmla="val 8000"/>
+            </a:avLst>
+          </a:prstGeom>
+          <a:solidFill>
+            <a:srgbClr val="F59E0B"/>
+          </a:solidFill>
+          <a:ln>
+            <a:noFill/>
+          </a:ln>
+          <a:effectLst/>
+        </p:spPr>
+        <p:style>
+          <a:lnRef idx="1">
+            <a:schemeClr val="accent1"/>
+          </a:lnRef>
+          <a:fillRef idx="3">
+            <a:schemeClr val="accent1"/>
+          </a:fillRef>
+          <a:effectRef idx="2">
+            <a:schemeClr val="accent1"/>
+          </a:effectRef>
+          <a:fontRef idx="minor">
+            <a:schemeClr val="lt1"/>
+          </a:fontRef>
+        </p:style>
+        <p:txBody>
+          <a:bodyPr rtlCol="0" anchor="ctr"/>
+          <a:lstStyle/>
+          <a:p>
+            <a:pPr algn="ctr"/>
+          </a:p>
+        </p:txBody>
+      </p:sp>
+      <p:sp>
+        <p:nvSpPr>
+          <p:cNvPr id="9" name="Rounded Rectangle 8"/>
+          <p:cNvSpPr/>
+          <p:nvPr/>
+        </p:nvSpPr>
+        <p:spPr>
+          <a:xfrm>
+            <a:off x="2000250" y="1181100"/>
+            <a:ext cx="123825" cy="123825"/>
+          </a:xfrm>
+          <a:prstGeom prst="roundRect">
+            <a:avLst>
+              <a:gd name="adj" fmla="val 8000"/>
+            </a:avLst>
+          </a:prstGeom>
+          <a:solidFill>
+            <a:srgbClr val="34D399"/>
+          </a:solidFill>
+          <a:ln>
+            <a:noFill/>
+          </a:ln>
+          <a:effectLst/>
+        </p:spPr>
+        <p:style>
+          <a:lnRef idx="1">
+            <a:schemeClr val="accent1"/>
+          </a:lnRef>
+          <a:fillRef idx="3">
+            <a:schemeClr val="accent1"/>
+          </a:fillRef>
+          <a:effectRef idx="2">
+            <a:schemeClr val="accent1"/>
+          </a:effectRef>
+          <a:fontRef idx="minor">
+            <a:schemeClr val="lt1"/>
+          </a:fontRef>
+        </p:style>
+        <p:txBody>
+          <a:bodyPr rtlCol="0" anchor="ctr"/>
+          <a:lstStyle/>
+          <a:p>
+            <a:pPr algn="ctr"/>
+          </a:p>
+        </p:txBody>
+      </p:sp>
+      <p:sp>
+        <p:nvSpPr>
+          <p:cNvPr id="10" name="TextBox 9"/>
           <p:cNvSpPr txBox="1"/>
           <p:nvPr/>
         </p:nvSpPr>
         <p:spPr>
           <a:xfrm>
-            <a:off x="9334500" y="0"/>
-            <a:ext cx="2667000" cy="704850"/>
+            <a:off x="2381250" y="1047750"/>
+            <a:ext cx="8286750" cy="381000"/>
+          </a:xfrm>
+          <a:prstGeom prst="rect">
+            <a:avLst/>
+          </a:prstGeom>
+          <a:noFill/>
+        </p:spPr>
+        <p:txBody>
+          <a:bodyPr wrap="square" anchor="ctr">
+            <a:spAutoFit/>
+          </a:bodyPr>
+          <a:lstStyle/>
+          <a:p>
+            <a:pPr algn="l">
+              <a:lnSpc>
+                <a:spcPct val="100000"/>
+              </a:lnSpc>
+            </a:pPr>
+            <a:r>
+              <a:rPr sz="1100" b="0">
+                <a:solidFill>
+                  <a:srgbClr val="94A3B8"/>
+                </a:solidFill>
+                <a:latin typeface="PingFang SC"/>
+              </a:rPr>
+              <a:t>terminal — 平台实测</a:t>
+            </a:r>
+          </a:p>
+        </p:txBody>
+      </p:sp>
+      <p:sp>
+        <p:nvSpPr>
+          <p:cNvPr id="11" name="TextBox 10"/>
+          <p:cNvSpPr txBox="1"/>
+          <p:nvPr/>
+        </p:nvSpPr>
+        <p:spPr>
+          <a:xfrm>
+            <a:off x="1562100" y="1581150"/>
+            <a:ext cx="9067800" cy="2571750"/>
+          </a:xfrm>
+          <a:prstGeom prst="rect">
+            <a:avLst/>
+          </a:prstGeom>
+          <a:noFill/>
+        </p:spPr>
+        <p:txBody>
+          <a:bodyPr wrap="square">
+            <a:spAutoFit/>
+          </a:bodyPr>
+          <a:lstStyle/>
+          <a:p>
+            <a:pPr>
+              <a:lnSpc>
+                <a:spcPct val="115000"/>
+              </a:lnSpc>
+            </a:pPr>
+            <a:r>
+              <a:rPr sz="1300" b="1">
+                <a:solidFill>
+                  <a:srgbClr val="34D399"/>
+                </a:solidFill>
+                <a:latin typeface="Menlo"/>
+              </a:rPr>
+              <a:t>$ curl -N -X POST :8000/v1/chat/completions</a:t>
+            </a:r>
+          </a:p>
+          <a:p>
+            <a:pPr>
+              <a:lnSpc>
+                <a:spcPct val="115000"/>
+              </a:lnSpc>
+            </a:pPr>
+            <a:r>
+              <a:rPr sz="1300">
+                <a:solidFill>
+                  <a:srgbClr val="CBD5E1"/>
+                </a:solidFill>
+                <a:latin typeface="Menlo"/>
+              </a:rPr>
+              <a:t>data: {"delta": "worl", "usage": null}</a:t>
+            </a:r>
+          </a:p>
+          <a:p>
+            <a:pPr>
+              <a:lnSpc>
+                <a:spcPct val="115000"/>
+              </a:lnSpc>
+            </a:pPr>
+            <a:r>
+              <a:rPr sz="1300">
+                <a:solidFill>
+                  <a:srgbClr val="CBD5E1"/>
+                </a:solidFill>
+                <a:latin typeface="Menlo"/>
+              </a:rPr>
+              <a:t>data: {"delta": "d, f", "usage": null}</a:t>
+            </a:r>
+          </a:p>
+          <a:p>
+            <a:pPr>
+              <a:lnSpc>
+                <a:spcPct val="115000"/>
+              </a:lnSpc>
+            </a:pPr>
+            <a:r>
+              <a:rPr sz="1300">
+                <a:solidFill>
+                  <a:srgbClr val="CBD5E1"/>
+                </a:solidFill>
+                <a:latin typeface="Menlo"/>
+              </a:rPr>
+              <a:t>data: {"delta": "rom ", "usage": null}</a:t>
+            </a:r>
+          </a:p>
+          <a:p>
+            <a:pPr>
+              <a:lnSpc>
+                <a:spcPct val="115000"/>
+              </a:lnSpc>
+            </a:pPr>
+            <a:r>
+              <a:rPr sz="1300">
+                <a:solidFill>
+                  <a:srgbClr val="CBD5E1"/>
+                </a:solidFill>
+                <a:latin typeface="Menlo"/>
+              </a:rPr>
+              <a:t>data: {"delta": "", "usage": {"total_tokens": 626}}</a:t>
+            </a:r>
+          </a:p>
+          <a:p>
+            <a:pPr>
+              <a:lnSpc>
+                <a:spcPct val="115000"/>
+              </a:lnSpc>
+            </a:pPr>
+            <a:r>
+              <a:rPr sz="1300">
+                <a:solidFill>
+                  <a:srgbClr val="CBD5E1"/>
+                </a:solidFill>
+                <a:latin typeface="Menlo"/>
+              </a:rPr>
+              <a:t>data: [DONE]</a:t>
+            </a:r>
+          </a:p>
+          <a:p>
+            <a:pPr>
+              <a:lnSpc>
+                <a:spcPct val="115000"/>
+              </a:lnSpc>
+            </a:pPr>
+            <a:r>
+              <a:rPr sz="1300">
+                <a:solidFill>
+                  <a:srgbClr val="94A3B8"/>
+                </a:solidFill>
+                <a:latin typeface="Menlo"/>
+              </a:rPr>
+              <a:t># 末帧强制携带 usage → 成本留痕数据源</a:t>
+            </a:r>
+          </a:p>
+        </p:txBody>
+      </p:sp>
+      <p:sp>
+        <p:nvSpPr>
+          <p:cNvPr id="12" name="TextBox 11"/>
+          <p:cNvSpPr txBox="1"/>
+          <p:nvPr/>
+        </p:nvSpPr>
+        <p:spPr>
+          <a:xfrm>
+            <a:off x="10287000" y="6534150"/>
+            <a:ext cx="1619250" cy="266700"/>
           </a:xfrm>
           <a:prstGeom prst="rect">
             <a:avLst/>
@@ -27496,447 +28044,6 @@
               </a:lnSpc>
             </a:pPr>
             <a:r>
-              <a:rPr sz="1100" b="0">
-                <a:solidFill>
-                  <a:srgbClr val="94A3B8"/>
-                </a:solidFill>
-                <a:latin typeface="PingFang SC"/>
-              </a:rPr>
-              <a:t>$ curl -N -X POST :8000/v1/chat/completions;data: {"delta": "worl", "usage": null};data: {"delta": "d, f", "usage": null};data: {"delta": "rom ", "usage": null};data: {"delta": "", "usage": {"total_tokens": 626}};data: [DONE];# 末帧强制携带 usage → 成本留痕数据源|平台真实输出</a:t>
-            </a:r>
-          </a:p>
-        </p:txBody>
-      </p:sp>
-      <p:sp>
-        <p:nvSpPr>
-          <p:cNvPr id="6" name="Rounded Rectangle 5"/>
-          <p:cNvSpPr/>
-          <p:nvPr/>
-        </p:nvSpPr>
-        <p:spPr>
-          <a:xfrm>
-            <a:off x="1333500" y="952500"/>
-            <a:ext cx="9525000" cy="5048250"/>
-          </a:xfrm>
-          <a:prstGeom prst="roundRect">
-            <a:avLst>
-              <a:gd name="adj" fmla="val 8000"/>
-            </a:avLst>
-          </a:prstGeom>
-          <a:solidFill>
-            <a:srgbClr val="0D1117"/>
-          </a:solidFill>
-          <a:ln>
-            <a:noFill/>
-          </a:ln>
-          <a:effectLst/>
-        </p:spPr>
-        <p:style>
-          <a:lnRef idx="1">
-            <a:schemeClr val="accent1"/>
-          </a:lnRef>
-          <a:fillRef idx="3">
-            <a:schemeClr val="accent1"/>
-          </a:fillRef>
-          <a:effectRef idx="2">
-            <a:schemeClr val="accent1"/>
-          </a:effectRef>
-          <a:fontRef idx="minor">
-            <a:schemeClr val="lt1"/>
-          </a:fontRef>
-        </p:style>
-        <p:txBody>
-          <a:bodyPr rtlCol="0" anchor="ctr"/>
-          <a:lstStyle/>
-          <a:p>
-            <a:pPr algn="ctr"/>
-          </a:p>
-        </p:txBody>
-      </p:sp>
-      <p:sp>
-        <p:nvSpPr>
-          <p:cNvPr id="7" name="Rectangle 6"/>
-          <p:cNvSpPr/>
-          <p:nvPr/>
-        </p:nvSpPr>
-        <p:spPr>
-          <a:xfrm>
-            <a:off x="1333500" y="952500"/>
-            <a:ext cx="9525000" cy="381000"/>
-          </a:xfrm>
-          <a:prstGeom prst="rect">
-            <a:avLst/>
-          </a:prstGeom>
-          <a:solidFill>
-            <a:srgbClr val="1F2937"/>
-          </a:solidFill>
-          <a:ln>
-            <a:noFill/>
-          </a:ln>
-          <a:effectLst/>
-        </p:spPr>
-        <p:style>
-          <a:lnRef idx="1">
-            <a:schemeClr val="accent1"/>
-          </a:lnRef>
-          <a:fillRef idx="3">
-            <a:schemeClr val="accent1"/>
-          </a:fillRef>
-          <a:effectRef idx="2">
-            <a:schemeClr val="accent1"/>
-          </a:effectRef>
-          <a:fontRef idx="minor">
-            <a:schemeClr val="lt1"/>
-          </a:fontRef>
-        </p:style>
-        <p:txBody>
-          <a:bodyPr rtlCol="0" anchor="ctr"/>
-          <a:lstStyle/>
-          <a:p>
-            <a:pPr algn="ctr"/>
-          </a:p>
-        </p:txBody>
-      </p:sp>
-      <p:sp>
-        <p:nvSpPr>
-          <p:cNvPr id="8" name="Rounded Rectangle 7"/>
-          <p:cNvSpPr/>
-          <p:nvPr/>
-        </p:nvSpPr>
-        <p:spPr>
-          <a:xfrm>
-            <a:off x="1504950" y="1085850"/>
-            <a:ext cx="123825" cy="123825"/>
-          </a:xfrm>
-          <a:prstGeom prst="roundRect">
-            <a:avLst>
-              <a:gd name="adj" fmla="val 8000"/>
-            </a:avLst>
-          </a:prstGeom>
-          <a:solidFill>
-            <a:srgbClr val="F87171"/>
-          </a:solidFill>
-          <a:ln>
-            <a:noFill/>
-          </a:ln>
-          <a:effectLst/>
-        </p:spPr>
-        <p:style>
-          <a:lnRef idx="1">
-            <a:schemeClr val="accent1"/>
-          </a:lnRef>
-          <a:fillRef idx="3">
-            <a:schemeClr val="accent1"/>
-          </a:fillRef>
-          <a:effectRef idx="2">
-            <a:schemeClr val="accent1"/>
-          </a:effectRef>
-          <a:fontRef idx="minor">
-            <a:schemeClr val="lt1"/>
-          </a:fontRef>
-        </p:style>
-        <p:txBody>
-          <a:bodyPr rtlCol="0" anchor="ctr"/>
-          <a:lstStyle/>
-          <a:p>
-            <a:pPr algn="ctr"/>
-          </a:p>
-        </p:txBody>
-      </p:sp>
-      <p:sp>
-        <p:nvSpPr>
-          <p:cNvPr id="9" name="Rounded Rectangle 8"/>
-          <p:cNvSpPr/>
-          <p:nvPr/>
-        </p:nvSpPr>
-        <p:spPr>
-          <a:xfrm>
-            <a:off x="1752600" y="1085850"/>
-            <a:ext cx="123825" cy="123825"/>
-          </a:xfrm>
-          <a:prstGeom prst="roundRect">
-            <a:avLst>
-              <a:gd name="adj" fmla="val 8000"/>
-            </a:avLst>
-          </a:prstGeom>
-          <a:solidFill>
-            <a:srgbClr val="F59E0B"/>
-          </a:solidFill>
-          <a:ln>
-            <a:noFill/>
-          </a:ln>
-          <a:effectLst/>
-        </p:spPr>
-        <p:style>
-          <a:lnRef idx="1">
-            <a:schemeClr val="accent1"/>
-          </a:lnRef>
-          <a:fillRef idx="3">
-            <a:schemeClr val="accent1"/>
-          </a:fillRef>
-          <a:effectRef idx="2">
-            <a:schemeClr val="accent1"/>
-          </a:effectRef>
-          <a:fontRef idx="minor">
-            <a:schemeClr val="lt1"/>
-          </a:fontRef>
-        </p:style>
-        <p:txBody>
-          <a:bodyPr rtlCol="0" anchor="ctr"/>
-          <a:lstStyle/>
-          <a:p>
-            <a:pPr algn="ctr"/>
-          </a:p>
-        </p:txBody>
-      </p:sp>
-      <p:sp>
-        <p:nvSpPr>
-          <p:cNvPr id="10" name="Rounded Rectangle 9"/>
-          <p:cNvSpPr/>
-          <p:nvPr/>
-        </p:nvSpPr>
-        <p:spPr>
-          <a:xfrm>
-            <a:off x="2000250" y="1085850"/>
-            <a:ext cx="123825" cy="123825"/>
-          </a:xfrm>
-          <a:prstGeom prst="roundRect">
-            <a:avLst>
-              <a:gd name="adj" fmla="val 8000"/>
-            </a:avLst>
-          </a:prstGeom>
-          <a:solidFill>
-            <a:srgbClr val="34D399"/>
-          </a:solidFill>
-          <a:ln>
-            <a:noFill/>
-          </a:ln>
-          <a:effectLst/>
-        </p:spPr>
-        <p:style>
-          <a:lnRef idx="1">
-            <a:schemeClr val="accent1"/>
-          </a:lnRef>
-          <a:fillRef idx="3">
-            <a:schemeClr val="accent1"/>
-          </a:fillRef>
-          <a:effectRef idx="2">
-            <a:schemeClr val="accent1"/>
-          </a:effectRef>
-          <a:fontRef idx="minor">
-            <a:schemeClr val="lt1"/>
-          </a:fontRef>
-        </p:style>
-        <p:txBody>
-          <a:bodyPr rtlCol="0" anchor="ctr"/>
-          <a:lstStyle/>
-          <a:p>
-            <a:pPr algn="ctr"/>
-          </a:p>
-        </p:txBody>
-      </p:sp>
-      <p:sp>
-        <p:nvSpPr>
-          <p:cNvPr id="11" name="TextBox 10"/>
-          <p:cNvSpPr txBox="1"/>
-          <p:nvPr/>
-        </p:nvSpPr>
-        <p:spPr>
-          <a:xfrm>
-            <a:off x="2381250" y="952500"/>
-            <a:ext cx="8286750" cy="381000"/>
-          </a:xfrm>
-          <a:prstGeom prst="rect">
-            <a:avLst/>
-          </a:prstGeom>
-          <a:noFill/>
-        </p:spPr>
-        <p:txBody>
-          <a:bodyPr wrap="square" anchor="ctr">
-            <a:spAutoFit/>
-          </a:bodyPr>
-          <a:lstStyle/>
-          <a:p>
-            <a:pPr algn="l">
-              <a:lnSpc>
-                <a:spcPct val="100000"/>
-              </a:lnSpc>
-            </a:pPr>
-            <a:r>
-              <a:rPr sz="1100" b="0">
-                <a:solidFill>
-                  <a:srgbClr val="94A3B8"/>
-                </a:solidFill>
-                <a:latin typeface="PingFang SC"/>
-              </a:rPr>
-              <a:t>terminal — 平台实测</a:t>
-            </a:r>
-          </a:p>
-        </p:txBody>
-      </p:sp>
-      <p:sp>
-        <p:nvSpPr>
-          <p:cNvPr id="12" name="TextBox 11"/>
-          <p:cNvSpPr txBox="1"/>
-          <p:nvPr/>
-        </p:nvSpPr>
-        <p:spPr>
-          <a:xfrm>
-            <a:off x="1562100" y="1485900"/>
-            <a:ext cx="9067800" cy="4381500"/>
-          </a:xfrm>
-          <a:prstGeom prst="rect">
-            <a:avLst/>
-          </a:prstGeom>
-          <a:noFill/>
-        </p:spPr>
-        <p:txBody>
-          <a:bodyPr wrap="square">
-            <a:spAutoFit/>
-          </a:bodyPr>
-          <a:lstStyle/>
-          <a:p>
-            <a:pPr>
-              <a:lnSpc>
-                <a:spcPct val="115000"/>
-              </a:lnSpc>
-            </a:pPr>
-            <a:r>
-              <a:rPr sz="1300" b="1">
-                <a:solidFill>
-                  <a:srgbClr val="34D399"/>
-                </a:solidFill>
-                <a:latin typeface="Menlo"/>
-              </a:rPr>
-              <a:t>$ curl -N -X POST :8000/v1/chat/completions</a:t>
-            </a:r>
-          </a:p>
-          <a:p>
-            <a:pPr>
-              <a:lnSpc>
-                <a:spcPct val="115000"/>
-              </a:lnSpc>
-            </a:pPr>
-            <a:r>
-              <a:rPr sz="1300">
-                <a:solidFill>
-                  <a:srgbClr val="CBD5E1"/>
-                </a:solidFill>
-                <a:latin typeface="Menlo"/>
-              </a:rPr>
-              <a:t>data: {"delta": "worl", "usage": null}</a:t>
-            </a:r>
-          </a:p>
-          <a:p>
-            <a:pPr>
-              <a:lnSpc>
-                <a:spcPct val="115000"/>
-              </a:lnSpc>
-            </a:pPr>
-            <a:r>
-              <a:rPr sz="1300">
-                <a:solidFill>
-                  <a:srgbClr val="CBD5E1"/>
-                </a:solidFill>
-                <a:latin typeface="Menlo"/>
-              </a:rPr>
-              <a:t>data: {"delta": "d, f", "usage": null}</a:t>
-            </a:r>
-          </a:p>
-          <a:p>
-            <a:pPr>
-              <a:lnSpc>
-                <a:spcPct val="115000"/>
-              </a:lnSpc>
-            </a:pPr>
-            <a:r>
-              <a:rPr sz="1300">
-                <a:solidFill>
-                  <a:srgbClr val="CBD5E1"/>
-                </a:solidFill>
-                <a:latin typeface="Menlo"/>
-              </a:rPr>
-              <a:t>data: {"delta": "rom ", "usage": null}</a:t>
-            </a:r>
-          </a:p>
-          <a:p>
-            <a:pPr>
-              <a:lnSpc>
-                <a:spcPct val="115000"/>
-              </a:lnSpc>
-            </a:pPr>
-            <a:r>
-              <a:rPr sz="1300">
-                <a:solidFill>
-                  <a:srgbClr val="CBD5E1"/>
-                </a:solidFill>
-                <a:latin typeface="Menlo"/>
-              </a:rPr>
-              <a:t>data: {"delta": "", "usage": {"total_tokens": 626}}</a:t>
-            </a:r>
-          </a:p>
-          <a:p>
-            <a:pPr>
-              <a:lnSpc>
-                <a:spcPct val="115000"/>
-              </a:lnSpc>
-            </a:pPr>
-            <a:r>
-              <a:rPr sz="1300">
-                <a:solidFill>
-                  <a:srgbClr val="CBD5E1"/>
-                </a:solidFill>
-                <a:latin typeface="Menlo"/>
-              </a:rPr>
-              <a:t>data: [DONE]</a:t>
-            </a:r>
-          </a:p>
-          <a:p>
-            <a:pPr>
-              <a:lnSpc>
-                <a:spcPct val="115000"/>
-              </a:lnSpc>
-            </a:pPr>
-            <a:r>
-              <a:rPr sz="1300">
-                <a:solidFill>
-                  <a:srgbClr val="94A3B8"/>
-                </a:solidFill>
-                <a:latin typeface="Menlo"/>
-              </a:rPr>
-              <a:t># 末帧强制携带 usage → 成本留痕数据源</a:t>
-            </a:r>
-          </a:p>
-        </p:txBody>
-      </p:sp>
-      <p:sp>
-        <p:nvSpPr>
-          <p:cNvPr id="13" name="TextBox 12"/>
-          <p:cNvSpPr txBox="1"/>
-          <p:nvPr/>
-        </p:nvSpPr>
-        <p:spPr>
-          <a:xfrm>
-            <a:off x="10287000" y="6534150"/>
-            <a:ext cx="1619250" cy="266700"/>
-          </a:xfrm>
-          <a:prstGeom prst="rect">
-            <a:avLst/>
-          </a:prstGeom>
-          <a:noFill/>
-        </p:spPr>
-        <p:txBody>
-          <a:bodyPr wrap="square" anchor="ctr">
-            <a:spAutoFit/>
-          </a:bodyPr>
-          <a:lstStyle/>
-          <a:p>
-            <a:pPr algn="r">
-              <a:lnSpc>
-                <a:spcPct val="100000"/>
-              </a:lnSpc>
-            </a:pPr>
-            <a:r>
               <a:rPr sz="900" b="0">
                 <a:solidFill>
                   <a:srgbClr val="94A3B8"/>
@@ -27950,7 +28057,7 @@
       </p:sp>
       <p:sp>
         <p:nvSpPr>
-          <p:cNvPr id="14" name="TextBox 13"/>
+          <p:cNvPr id="13" name="TextBox 12"/>
           <p:cNvSpPr txBox="1"/>
           <p:nvPr/>
         </p:nvSpPr>
@@ -30124,14 +30231,230 @@
       </p:sp>
       <p:sp>
         <p:nvSpPr>
-          <p:cNvPr id="5" name="TextBox 4"/>
+          <p:cNvPr id="5" name="Rounded Rectangle 4"/>
+          <p:cNvSpPr/>
+          <p:nvPr/>
+        </p:nvSpPr>
+        <p:spPr>
+          <a:xfrm>
+            <a:off x="857250" y="2667000"/>
+            <a:ext cx="10477500" cy="1143000"/>
+          </a:xfrm>
+          <a:prstGeom prst="roundRect">
+            <a:avLst>
+              <a:gd name="adj" fmla="val 8000"/>
+            </a:avLst>
+          </a:prstGeom>
+          <a:solidFill>
+            <a:srgbClr val="FFFFFF"/>
+          </a:solidFill>
+          <a:ln w="12700">
+            <a:solidFill>
+              <a:srgbClr val="2563EB"/>
+            </a:solidFill>
+          </a:ln>
+          <a:effectLst/>
+        </p:spPr>
+        <p:style>
+          <a:lnRef idx="1">
+            <a:schemeClr val="accent1"/>
+          </a:lnRef>
+          <a:fillRef idx="3">
+            <a:schemeClr val="accent1"/>
+          </a:fillRef>
+          <a:effectRef idx="2">
+            <a:schemeClr val="accent1"/>
+          </a:effectRef>
+          <a:fontRef idx="minor">
+            <a:schemeClr val="lt1"/>
+          </a:fontRef>
+        </p:style>
+        <p:txBody>
+          <a:bodyPr rtlCol="0" anchor="ctr"/>
+          <a:lstStyle/>
+          <a:p>
+            <a:pPr algn="ctr"/>
+          </a:p>
+        </p:txBody>
+      </p:sp>
+      <p:sp>
+        <p:nvSpPr>
+          <p:cNvPr id="6" name="Rectangle 5"/>
+          <p:cNvSpPr/>
+          <p:nvPr/>
+        </p:nvSpPr>
+        <p:spPr>
+          <a:xfrm>
+            <a:off x="857250" y="2667000"/>
+            <a:ext cx="10477500" cy="57150"/>
+          </a:xfrm>
+          <a:prstGeom prst="rect">
+            <a:avLst/>
+          </a:prstGeom>
+          <a:solidFill>
+            <a:srgbClr val="2563EB"/>
+          </a:solidFill>
+          <a:ln>
+            <a:noFill/>
+          </a:ln>
+          <a:effectLst/>
+        </p:spPr>
+        <p:style>
+          <a:lnRef idx="1">
+            <a:schemeClr val="accent1"/>
+          </a:lnRef>
+          <a:fillRef idx="3">
+            <a:schemeClr val="accent1"/>
+          </a:fillRef>
+          <a:effectRef idx="2">
+            <a:schemeClr val="accent1"/>
+          </a:effectRef>
+          <a:fontRef idx="minor">
+            <a:schemeClr val="lt1"/>
+          </a:fontRef>
+        </p:style>
+        <p:txBody>
+          <a:bodyPr rtlCol="0" anchor="ctr"/>
+          <a:lstStyle/>
+          <a:p>
+            <a:pPr algn="ctr"/>
+          </a:p>
+        </p:txBody>
+      </p:sp>
+      <p:sp>
+        <p:nvSpPr>
+          <p:cNvPr id="7" name="Rounded Rectangle 6"/>
+          <p:cNvSpPr/>
+          <p:nvPr/>
+        </p:nvSpPr>
+        <p:spPr>
+          <a:xfrm>
+            <a:off x="5953125" y="2524125"/>
+            <a:ext cx="285750" cy="285750"/>
+          </a:xfrm>
+          <a:prstGeom prst="roundRect">
+            <a:avLst>
+              <a:gd name="adj" fmla="val 8000"/>
+            </a:avLst>
+          </a:prstGeom>
+          <a:solidFill>
+            <a:srgbClr val="2563EB"/>
+          </a:solidFill>
+          <a:ln>
+            <a:noFill/>
+          </a:ln>
+          <a:effectLst/>
+        </p:spPr>
+        <p:style>
+          <a:lnRef idx="1">
+            <a:schemeClr val="accent1"/>
+          </a:lnRef>
+          <a:fillRef idx="3">
+            <a:schemeClr val="accent1"/>
+          </a:fillRef>
+          <a:effectRef idx="2">
+            <a:schemeClr val="accent1"/>
+          </a:effectRef>
+          <a:fontRef idx="minor">
+            <a:schemeClr val="lt1"/>
+          </a:fontRef>
+        </p:style>
+        <p:txBody>
+          <a:bodyPr rtlCol="0" anchor="ctr"/>
+          <a:lstStyle/>
+          <a:p>
+            <a:pPr algn="ctr"/>
+          </a:p>
+        </p:txBody>
+      </p:sp>
+      <p:sp>
+        <p:nvSpPr>
+          <p:cNvPr id="8" name="TextBox 7"/>
           <p:cNvSpPr txBox="1"/>
           <p:nvPr/>
         </p:nvSpPr>
         <p:spPr>
           <a:xfrm>
-            <a:off x="9334500" y="0"/>
-            <a:ext cx="2667000" cy="704850"/>
+            <a:off x="5953125" y="2514600"/>
+            <a:ext cx="285750" cy="285750"/>
+          </a:xfrm>
+          <a:prstGeom prst="rect">
+            <a:avLst/>
+          </a:prstGeom>
+          <a:noFill/>
+        </p:spPr>
+        <p:txBody>
+          <a:bodyPr wrap="square" anchor="ctr">
+            <a:spAutoFit/>
+          </a:bodyPr>
+          <a:lstStyle/>
+          <a:p>
+            <a:pPr algn="ctr">
+              <a:lnSpc>
+                <a:spcPct val="100000"/>
+              </a:lnSpc>
+            </a:pPr>
+            <a:r>
+              <a:rPr sz="1300" b="1">
+                <a:solidFill>
+                  <a:srgbClr val="FFFFFF"/>
+                </a:solidFill>
+                <a:latin typeface="PingFang SC"/>
+              </a:rPr>
+              <a:t>1</a:t>
+            </a:r>
+          </a:p>
+        </p:txBody>
+      </p:sp>
+      <p:sp>
+        <p:nvSpPr>
+          <p:cNvPr id="9" name="TextBox 8"/>
+          <p:cNvSpPr txBox="1"/>
+          <p:nvPr/>
+        </p:nvSpPr>
+        <p:spPr>
+          <a:xfrm>
+            <a:off x="933450" y="2800350"/>
+            <a:ext cx="10325100" cy="952500"/>
+          </a:xfrm>
+          <a:prstGeom prst="rect">
+            <a:avLst/>
+          </a:prstGeom>
+          <a:noFill/>
+        </p:spPr>
+        <p:txBody>
+          <a:bodyPr wrap="square" anchor="ctr">
+            <a:spAutoFit/>
+          </a:bodyPr>
+          <a:lstStyle/>
+          <a:p>
+            <a:pPr algn="ctr">
+              <a:lnSpc>
+                <a:spcPct val="100000"/>
+              </a:lnSpc>
+            </a:pPr>
+            <a:r>
+              <a:rPr sz="1200" b="1">
+                <a:solidFill>
+                  <a:srgbClr val="475569"/>
+                </a:solidFill>
+                <a:latin typeface="PingFang SC"/>
+              </a:rPr>
+              <a:t>note=直接逐帧 DOM 更新会卡:节流是前端必修课</a:t>
+            </a:r>
+          </a:p>
+        </p:txBody>
+      </p:sp>
+      <p:sp>
+        <p:nvSpPr>
+          <p:cNvPr id="10" name="TextBox 9"/>
+          <p:cNvSpPr txBox="1"/>
+          <p:nvPr/>
+        </p:nvSpPr>
+        <p:spPr>
+          <a:xfrm>
+            <a:off x="10287000" y="6534150"/>
+            <a:ext cx="1619250" cy="266700"/>
           </a:xfrm>
           <a:prstGeom prst="rect">
             <a:avLst/>
@@ -30150,261 +30473,6 @@
               </a:lnSpc>
             </a:pPr>
             <a:r>
-              <a:rPr sz="1100" b="0">
-                <a:solidFill>
-                  <a:srgbClr val="94A3B8"/>
-                </a:solidFill>
-                <a:latin typeface="PingFang SC"/>
-              </a:rPr>
-              <a:t>TTFT&lt;200ms 上屏</a:t>
-            </a:r>
-          </a:p>
-        </p:txBody>
-      </p:sp>
-      <p:sp>
-        <p:nvSpPr>
-          <p:cNvPr id="6" name="Rounded Rectangle 5"/>
-          <p:cNvSpPr/>
-          <p:nvPr/>
-        </p:nvSpPr>
-        <p:spPr>
-          <a:xfrm>
-            <a:off x="857250" y="2667000"/>
-            <a:ext cx="10477500" cy="1143000"/>
-          </a:xfrm>
-          <a:prstGeom prst="roundRect">
-            <a:avLst>
-              <a:gd name="adj" fmla="val 8000"/>
-            </a:avLst>
-          </a:prstGeom>
-          <a:solidFill>
-            <a:srgbClr val="FFFFFF"/>
-          </a:solidFill>
-          <a:ln w="12700">
-            <a:solidFill>
-              <a:srgbClr val="2563EB"/>
-            </a:solidFill>
-          </a:ln>
-          <a:effectLst/>
-        </p:spPr>
-        <p:style>
-          <a:lnRef idx="1">
-            <a:schemeClr val="accent1"/>
-          </a:lnRef>
-          <a:fillRef idx="3">
-            <a:schemeClr val="accent1"/>
-          </a:fillRef>
-          <a:effectRef idx="2">
-            <a:schemeClr val="accent1"/>
-          </a:effectRef>
-          <a:fontRef idx="minor">
-            <a:schemeClr val="lt1"/>
-          </a:fontRef>
-        </p:style>
-        <p:txBody>
-          <a:bodyPr rtlCol="0" anchor="ctr"/>
-          <a:lstStyle/>
-          <a:p>
-            <a:pPr algn="ctr"/>
-          </a:p>
-        </p:txBody>
-      </p:sp>
-      <p:sp>
-        <p:nvSpPr>
-          <p:cNvPr id="7" name="Rectangle 6"/>
-          <p:cNvSpPr/>
-          <p:nvPr/>
-        </p:nvSpPr>
-        <p:spPr>
-          <a:xfrm>
-            <a:off x="857250" y="2667000"/>
-            <a:ext cx="10477500" cy="57150"/>
-          </a:xfrm>
-          <a:prstGeom prst="rect">
-            <a:avLst/>
-          </a:prstGeom>
-          <a:solidFill>
-            <a:srgbClr val="2563EB"/>
-          </a:solidFill>
-          <a:ln>
-            <a:noFill/>
-          </a:ln>
-          <a:effectLst/>
-        </p:spPr>
-        <p:style>
-          <a:lnRef idx="1">
-            <a:schemeClr val="accent1"/>
-          </a:lnRef>
-          <a:fillRef idx="3">
-            <a:schemeClr val="accent1"/>
-          </a:fillRef>
-          <a:effectRef idx="2">
-            <a:schemeClr val="accent1"/>
-          </a:effectRef>
-          <a:fontRef idx="minor">
-            <a:schemeClr val="lt1"/>
-          </a:fontRef>
-        </p:style>
-        <p:txBody>
-          <a:bodyPr rtlCol="0" anchor="ctr"/>
-          <a:lstStyle/>
-          <a:p>
-            <a:pPr algn="ctr"/>
-          </a:p>
-        </p:txBody>
-      </p:sp>
-      <p:sp>
-        <p:nvSpPr>
-          <p:cNvPr id="8" name="Rounded Rectangle 7"/>
-          <p:cNvSpPr/>
-          <p:nvPr/>
-        </p:nvSpPr>
-        <p:spPr>
-          <a:xfrm>
-            <a:off x="5953125" y="2524125"/>
-            <a:ext cx="285750" cy="285750"/>
-          </a:xfrm>
-          <a:prstGeom prst="roundRect">
-            <a:avLst>
-              <a:gd name="adj" fmla="val 8000"/>
-            </a:avLst>
-          </a:prstGeom>
-          <a:solidFill>
-            <a:srgbClr val="2563EB"/>
-          </a:solidFill>
-          <a:ln>
-            <a:noFill/>
-          </a:ln>
-          <a:effectLst/>
-        </p:spPr>
-        <p:style>
-          <a:lnRef idx="1">
-            <a:schemeClr val="accent1"/>
-          </a:lnRef>
-          <a:fillRef idx="3">
-            <a:schemeClr val="accent1"/>
-          </a:fillRef>
-          <a:effectRef idx="2">
-            <a:schemeClr val="accent1"/>
-          </a:effectRef>
-          <a:fontRef idx="minor">
-            <a:schemeClr val="lt1"/>
-          </a:fontRef>
-        </p:style>
-        <p:txBody>
-          <a:bodyPr rtlCol="0" anchor="ctr"/>
-          <a:lstStyle/>
-          <a:p>
-            <a:pPr algn="ctr"/>
-          </a:p>
-        </p:txBody>
-      </p:sp>
-      <p:sp>
-        <p:nvSpPr>
-          <p:cNvPr id="9" name="TextBox 8"/>
-          <p:cNvSpPr txBox="1"/>
-          <p:nvPr/>
-        </p:nvSpPr>
-        <p:spPr>
-          <a:xfrm>
-            <a:off x="5953125" y="2514600"/>
-            <a:ext cx="285750" cy="285750"/>
-          </a:xfrm>
-          <a:prstGeom prst="rect">
-            <a:avLst/>
-          </a:prstGeom>
-          <a:noFill/>
-        </p:spPr>
-        <p:txBody>
-          <a:bodyPr wrap="square" anchor="ctr">
-            <a:spAutoFit/>
-          </a:bodyPr>
-          <a:lstStyle/>
-          <a:p>
-            <a:pPr algn="ctr">
-              <a:lnSpc>
-                <a:spcPct val="100000"/>
-              </a:lnSpc>
-            </a:pPr>
-            <a:r>
-              <a:rPr sz="1300" b="1">
-                <a:solidFill>
-                  <a:srgbClr val="FFFFFF"/>
-                </a:solidFill>
-                <a:latin typeface="PingFang SC"/>
-              </a:rPr>
-              <a:t>1</a:t>
-            </a:r>
-          </a:p>
-        </p:txBody>
-      </p:sp>
-      <p:sp>
-        <p:nvSpPr>
-          <p:cNvPr id="10" name="TextBox 9"/>
-          <p:cNvSpPr txBox="1"/>
-          <p:nvPr/>
-        </p:nvSpPr>
-        <p:spPr>
-          <a:xfrm>
-            <a:off x="933450" y="2800350"/>
-            <a:ext cx="10325100" cy="952500"/>
-          </a:xfrm>
-          <a:prstGeom prst="rect">
-            <a:avLst/>
-          </a:prstGeom>
-          <a:noFill/>
-        </p:spPr>
-        <p:txBody>
-          <a:bodyPr wrap="square" anchor="ctr">
-            <a:spAutoFit/>
-          </a:bodyPr>
-          <a:lstStyle/>
-          <a:p>
-            <a:pPr algn="ctr">
-              <a:lnSpc>
-                <a:spcPct val="100000"/>
-              </a:lnSpc>
-            </a:pPr>
-            <a:r>
-              <a:rPr sz="1200" b="1">
-                <a:solidFill>
-                  <a:srgbClr val="475569"/>
-                </a:solidFill>
-                <a:latin typeface="PingFang SC"/>
-              </a:rPr>
-              <a:t>note=直接逐帧 DOM 更新会卡:节流是前端必修课|TTFT&lt;200ms 上屏</a:t>
-            </a:r>
-          </a:p>
-        </p:txBody>
-      </p:sp>
-      <p:sp>
-        <p:nvSpPr>
-          <p:cNvPr id="11" name="TextBox 10"/>
-          <p:cNvSpPr txBox="1"/>
-          <p:nvPr/>
-        </p:nvSpPr>
-        <p:spPr>
-          <a:xfrm>
-            <a:off x="10287000" y="6534150"/>
-            <a:ext cx="1619250" cy="266700"/>
-          </a:xfrm>
-          <a:prstGeom prst="rect">
-            <a:avLst/>
-          </a:prstGeom>
-          <a:noFill/>
-        </p:spPr>
-        <p:txBody>
-          <a:bodyPr wrap="square" anchor="ctr">
-            <a:spAutoFit/>
-          </a:bodyPr>
-          <a:lstStyle/>
-          <a:p>
-            <a:pPr algn="r">
-              <a:lnSpc>
-                <a:spcPct val="100000"/>
-              </a:lnSpc>
-            </a:pPr>
-            <a:r>
               <a:rPr sz="900" b="0">
                 <a:solidFill>
                   <a:srgbClr val="94A3B8"/>
@@ -30418,7 +30486,7 @@
       </p:sp>
       <p:sp>
         <p:nvSpPr>
-          <p:cNvPr id="12" name="TextBox 11"/>
+          <p:cNvPr id="11" name="TextBox 10"/>
           <p:cNvSpPr txBox="1"/>
           <p:nvPr/>
         </p:nvSpPr>

--- a/03-课件PPT/讲次版/第1章-2-讲次 1-2 · Streaming 流式输出.pptx
+++ b/03-课件PPT/讲次版/第1章-2-讲次 1-2 · Streaming 流式输出.pptx
@@ -5317,8 +5317,8 @@
         </p:nvSpPr>
         <p:spPr>
           <a:xfrm>
-            <a:off x="5500687" y="2133600"/>
-            <a:ext cx="1123950" cy="285750"/>
+            <a:off x="5500687" y="2124075"/>
+            <a:ext cx="1123950" cy="304800"/>
           </a:xfrm>
           <a:prstGeom prst="roundRect">
             <a:avLst>
@@ -5365,8 +5365,8 @@
         </p:nvSpPr>
         <p:spPr>
           <a:xfrm>
-            <a:off x="5500687" y="2133600"/>
-            <a:ext cx="1123950" cy="285750"/>
+            <a:off x="5500687" y="2124075"/>
+            <a:ext cx="1123950" cy="304800"/>
           </a:xfrm>
           <a:prstGeom prst="rect">
             <a:avLst/>
@@ -5483,8 +5483,8 @@
         </p:nvSpPr>
         <p:spPr>
           <a:xfrm>
-            <a:off x="5567362" y="2133600"/>
-            <a:ext cx="1123950" cy="285750"/>
+            <a:off x="5567362" y="2124075"/>
+            <a:ext cx="1123950" cy="304800"/>
           </a:xfrm>
           <a:prstGeom prst="roundRect">
             <a:avLst>
@@ -5531,8 +5531,8 @@
         </p:nvSpPr>
         <p:spPr>
           <a:xfrm>
-            <a:off x="5567362" y="2133600"/>
-            <a:ext cx="1123950" cy="285750"/>
+            <a:off x="5567362" y="2124075"/>
+            <a:ext cx="1123950" cy="304800"/>
           </a:xfrm>
           <a:prstGeom prst="rect">
             <a:avLst/>
@@ -5649,8 +5649,8 @@
         </p:nvSpPr>
         <p:spPr>
           <a:xfrm>
-            <a:off x="2847975" y="2814637"/>
-            <a:ext cx="1543050" cy="285750"/>
+            <a:off x="3128963" y="2805112"/>
+            <a:ext cx="981075" cy="304800"/>
           </a:xfrm>
           <a:prstGeom prst="roundRect">
             <a:avLst>
@@ -5697,8 +5697,8 @@
         </p:nvSpPr>
         <p:spPr>
           <a:xfrm>
-            <a:off x="2847975" y="2814637"/>
-            <a:ext cx="1543050" cy="285750"/>
+            <a:off x="3128963" y="2805112"/>
+            <a:ext cx="981075" cy="304800"/>
           </a:xfrm>
           <a:prstGeom prst="rect">
             <a:avLst/>
@@ -5735,247 +5735,136 @@
           <p:nvPr/>
         </p:nvCxnSpPr>
         <p:spPr>
-          <a:xfrm flipV="1">
-            <a:off x="3619500" y="1562100"/>
-            <a:ext cx="0" cy="419100"/>
+          <a:xfrm>
+            <a:off x="8572500" y="2552700"/>
+            <a:ext cx="0" cy="809625"/>
           </a:xfrm>
           <a:prstGeom prst="line">
             <a:avLst/>
           </a:prstGeom>
+          <a:ln w="19050">
+            <a:solidFill>
+              <a:srgbClr val="2563EB"/>
+            </a:solidFill>
+          </a:ln>
+        </p:spPr>
+        <p:style>
+          <a:lnRef idx="2">
+            <a:schemeClr val="accent1"/>
+          </a:lnRef>
+          <a:fillRef idx="0">
+            <a:schemeClr val="accent1"/>
+          </a:fillRef>
+          <a:effectRef idx="1">
+            <a:schemeClr val="accent1"/>
+          </a:effectRef>
+          <a:fontRef idx="minor">
+            <a:schemeClr val="tx1"/>
+          </a:fontRef>
+        </p:style>
+      </p:cxnSp>
+      <p:sp>
+        <p:nvSpPr>
+          <p:cNvPr id="26" name="Isosceles Triangle 25"/>
+          <p:cNvSpPr/>
+          <p:nvPr/>
+        </p:nvSpPr>
+        <p:spPr>
+          <a:xfrm rot="10800000">
+            <a:off x="8529638" y="3276601"/>
+            <a:ext cx="85725" cy="85725"/>
+          </a:xfrm>
+          <a:prstGeom prst="triangle">
+            <a:avLst/>
+          </a:prstGeom>
+          <a:solidFill>
+            <a:srgbClr val="2563EB"/>
+          </a:solidFill>
+          <a:ln>
+            <a:noFill/>
+          </a:ln>
+          <a:effectLst/>
+        </p:spPr>
+        <p:style>
+          <a:lnRef idx="1">
+            <a:schemeClr val="accent1"/>
+          </a:lnRef>
+          <a:fillRef idx="3">
+            <a:schemeClr val="accent1"/>
+          </a:fillRef>
+          <a:effectRef idx="2">
+            <a:schemeClr val="accent1"/>
+          </a:effectRef>
+          <a:fontRef idx="minor">
+            <a:schemeClr val="lt1"/>
+          </a:fontRef>
+        </p:style>
+        <p:txBody>
+          <a:bodyPr rtlCol="0" anchor="ctr"/>
+          <a:lstStyle/>
+          <a:p>
+            <a:pPr algn="ctr"/>
+          </a:p>
+        </p:txBody>
+      </p:sp>
+      <p:sp>
+        <p:nvSpPr>
+          <p:cNvPr id="27" name="Rounded Rectangle 26"/>
+          <p:cNvSpPr/>
+          <p:nvPr/>
+        </p:nvSpPr>
+        <p:spPr>
+          <a:xfrm>
+            <a:off x="8210550" y="2805112"/>
+            <a:ext cx="723900" cy="304800"/>
+          </a:xfrm>
+          <a:prstGeom prst="roundRect">
+            <a:avLst>
+              <a:gd name="adj" fmla="val 8000"/>
+            </a:avLst>
+          </a:prstGeom>
+          <a:solidFill>
+            <a:srgbClr val="FFFFFF"/>
+          </a:solidFill>
           <a:ln w="12700">
             <a:solidFill>
               <a:srgbClr val="DDE5EE"/>
             </a:solidFill>
-            <a:prstDash val="dash"/>
-          </a:ln>
-          <a:effectLst/>
-        </p:spPr>
-        <p:style>
-          <a:lnRef idx="2">
-            <a:schemeClr val="accent1"/>
-          </a:lnRef>
-          <a:fillRef idx="0">
-            <a:schemeClr val="accent1"/>
-          </a:fillRef>
-          <a:effectRef idx="1">
-            <a:schemeClr val="accent1"/>
-          </a:effectRef>
-          <a:fontRef idx="minor">
-            <a:schemeClr val="tx1"/>
-          </a:fontRef>
-        </p:style>
-      </p:cxnSp>
-      <p:cxnSp>
-        <p:nvCxnSpPr>
-          <p:cNvPr id="26" name="Connector 25"/>
-          <p:cNvCxnSpPr/>
-          <p:nvPr/>
-        </p:nvCxnSpPr>
-        <p:spPr>
-          <a:xfrm>
-            <a:off x="3619500" y="1562100"/>
-            <a:ext cx="4953000" cy="0"/>
-          </a:xfrm>
-          <a:prstGeom prst="line">
-            <a:avLst/>
-          </a:prstGeom>
-          <a:ln w="12700">
-            <a:solidFill>
-              <a:srgbClr val="DDE5EE"/>
-            </a:solidFill>
-            <a:prstDash val="dash"/>
-          </a:ln>
-          <a:effectLst/>
-        </p:spPr>
-        <p:style>
-          <a:lnRef idx="2">
-            <a:schemeClr val="accent1"/>
-          </a:lnRef>
-          <a:fillRef idx="0">
-            <a:schemeClr val="accent1"/>
-          </a:fillRef>
-          <a:effectRef idx="1">
-            <a:schemeClr val="accent1"/>
-          </a:effectRef>
-          <a:fontRef idx="minor">
-            <a:schemeClr val="tx1"/>
-          </a:fontRef>
-        </p:style>
-      </p:cxnSp>
-      <p:cxnSp>
-        <p:nvCxnSpPr>
-          <p:cNvPr id="27" name="Connector 26"/>
-          <p:cNvCxnSpPr/>
-          <p:nvPr/>
-        </p:nvCxnSpPr>
-        <p:spPr>
-          <a:xfrm>
-            <a:off x="8572500" y="1562100"/>
-            <a:ext cx="0" cy="1781175"/>
-          </a:xfrm>
-          <a:prstGeom prst="line">
-            <a:avLst/>
-          </a:prstGeom>
-          <a:ln w="12700">
-            <a:solidFill>
-              <a:srgbClr val="DDE5EE"/>
-            </a:solidFill>
-            <a:prstDash val="dash"/>
-          </a:ln>
-          <a:effectLst/>
-        </p:spPr>
-        <p:style>
-          <a:lnRef idx="2">
-            <a:schemeClr val="accent1"/>
-          </a:lnRef>
-          <a:fillRef idx="0">
-            <a:schemeClr val="accent1"/>
-          </a:fillRef>
-          <a:effectRef idx="1">
-            <a:schemeClr val="accent1"/>
-          </a:effectRef>
-          <a:fontRef idx="minor">
-            <a:schemeClr val="tx1"/>
-          </a:fontRef>
-        </p:style>
-      </p:cxnSp>
-      <p:cxnSp>
-        <p:nvCxnSpPr>
-          <p:cNvPr id="28" name="Connector 27"/>
-          <p:cNvCxnSpPr/>
-          <p:nvPr/>
-        </p:nvCxnSpPr>
-        <p:spPr>
-          <a:xfrm>
-            <a:off x="8572500" y="2552700"/>
-            <a:ext cx="0" cy="809625"/>
-          </a:xfrm>
-          <a:prstGeom prst="line">
-            <a:avLst/>
-          </a:prstGeom>
-          <a:ln w="19050">
-            <a:solidFill>
-              <a:srgbClr val="2563EB"/>
-            </a:solidFill>
-          </a:ln>
-        </p:spPr>
-        <p:style>
-          <a:lnRef idx="2">
-            <a:schemeClr val="accent1"/>
-          </a:lnRef>
-          <a:fillRef idx="0">
-            <a:schemeClr val="accent1"/>
-          </a:fillRef>
-          <a:effectRef idx="1">
-            <a:schemeClr val="accent1"/>
-          </a:effectRef>
-          <a:fontRef idx="minor">
-            <a:schemeClr val="tx1"/>
-          </a:fontRef>
-        </p:style>
-      </p:cxnSp>
-      <p:sp>
-        <p:nvSpPr>
-          <p:cNvPr id="29" name="Isosceles Triangle 28"/>
-          <p:cNvSpPr/>
-          <p:nvPr/>
-        </p:nvSpPr>
-        <p:spPr>
-          <a:xfrm rot="10800000">
-            <a:off x="8529638" y="3276601"/>
-            <a:ext cx="85725" cy="85725"/>
-          </a:xfrm>
-          <a:prstGeom prst="triangle">
-            <a:avLst/>
-          </a:prstGeom>
-          <a:solidFill>
-            <a:srgbClr val="2563EB"/>
-          </a:solidFill>
-          <a:ln>
-            <a:noFill/>
-          </a:ln>
-          <a:effectLst/>
-        </p:spPr>
-        <p:style>
-          <a:lnRef idx="1">
-            <a:schemeClr val="accent1"/>
-          </a:lnRef>
-          <a:fillRef idx="3">
-            <a:schemeClr val="accent1"/>
-          </a:fillRef>
-          <a:effectRef idx="2">
-            <a:schemeClr val="accent1"/>
-          </a:effectRef>
-          <a:fontRef idx="minor">
-            <a:schemeClr val="lt1"/>
-          </a:fontRef>
-        </p:style>
-        <p:txBody>
-          <a:bodyPr rtlCol="0" anchor="ctr"/>
-          <a:lstStyle/>
-          <a:p>
-            <a:pPr algn="ctr"/>
-          </a:p>
-        </p:txBody>
-      </p:sp>
-      <p:sp>
-        <p:nvSpPr>
-          <p:cNvPr id="30" name="Rounded Rectangle 29"/>
-          <p:cNvSpPr/>
-          <p:nvPr/>
-        </p:nvSpPr>
-        <p:spPr>
-          <a:xfrm>
-            <a:off x="8220075" y="2814637"/>
-            <a:ext cx="704850" cy="285750"/>
-          </a:xfrm>
-          <a:prstGeom prst="roundRect">
-            <a:avLst>
-              <a:gd name="adj" fmla="val 8000"/>
-            </a:avLst>
-          </a:prstGeom>
-          <a:solidFill>
-            <a:srgbClr val="FFFFFF"/>
-          </a:solidFill>
-          <a:ln w="12700">
-            <a:solidFill>
-              <a:srgbClr val="DDE5EE"/>
-            </a:solidFill>
-          </a:ln>
-          <a:effectLst/>
-        </p:spPr>
-        <p:style>
-          <a:lnRef idx="1">
-            <a:schemeClr val="accent1"/>
-          </a:lnRef>
-          <a:fillRef idx="3">
-            <a:schemeClr val="accent1"/>
-          </a:fillRef>
-          <a:effectRef idx="2">
-            <a:schemeClr val="accent1"/>
-          </a:effectRef>
-          <a:fontRef idx="minor">
-            <a:schemeClr val="lt1"/>
-          </a:fontRef>
-        </p:style>
-        <p:txBody>
-          <a:bodyPr rtlCol="0" anchor="ctr"/>
-          <a:lstStyle/>
-          <a:p>
-            <a:pPr algn="ctr"/>
-          </a:p>
-        </p:txBody>
-      </p:sp>
-      <p:sp>
-        <p:nvSpPr>
-          <p:cNvPr id="31" name="TextBox 30"/>
+          </a:ln>
+          <a:effectLst/>
+        </p:spPr>
+        <p:style>
+          <a:lnRef idx="1">
+            <a:schemeClr val="accent1"/>
+          </a:lnRef>
+          <a:fillRef idx="3">
+            <a:schemeClr val="accent1"/>
+          </a:fillRef>
+          <a:effectRef idx="2">
+            <a:schemeClr val="accent1"/>
+          </a:effectRef>
+          <a:fontRef idx="minor">
+            <a:schemeClr val="lt1"/>
+          </a:fontRef>
+        </p:style>
+        <p:txBody>
+          <a:bodyPr rtlCol="0" anchor="ctr"/>
+          <a:lstStyle/>
+          <a:p>
+            <a:pPr algn="ctr"/>
+          </a:p>
+        </p:txBody>
+      </p:sp>
+      <p:sp>
+        <p:nvSpPr>
+          <p:cNvPr id="28" name="TextBox 27"/>
           <p:cNvSpPr txBox="1"/>
           <p:nvPr/>
         </p:nvSpPr>
         <p:spPr>
           <a:xfrm>
-            <a:off x="8220075" y="2814637"/>
-            <a:ext cx="704850" cy="285750"/>
+            <a:off x="8210550" y="2805112"/>
+            <a:ext cx="723900" cy="304800"/>
           </a:xfrm>
           <a:prstGeom prst="rect">
             <a:avLst/>
@@ -6007,7 +5896,92 @@
       </p:sp>
       <p:sp>
         <p:nvSpPr>
-          <p:cNvPr id="32" name="TextBox 31"/>
+          <p:cNvPr id="29" name="Rounded Rectangle 28"/>
+          <p:cNvSpPr/>
+          <p:nvPr/>
+        </p:nvSpPr>
+        <p:spPr>
+          <a:xfrm>
+            <a:off x="1143000" y="6229350"/>
+            <a:ext cx="9906000" cy="381000"/>
+          </a:xfrm>
+          <a:prstGeom prst="roundRect">
+            <a:avLst>
+              <a:gd name="adj" fmla="val 8000"/>
+            </a:avLst>
+          </a:prstGeom>
+          <a:solidFill>
+            <a:srgbClr val="F1F5F9"/>
+          </a:solidFill>
+          <a:ln>
+            <a:noFill/>
+          </a:ln>
+          <a:effectLst/>
+        </p:spPr>
+        <p:style>
+          <a:lnRef idx="1">
+            <a:schemeClr val="accent1"/>
+          </a:lnRef>
+          <a:fillRef idx="3">
+            <a:schemeClr val="accent1"/>
+          </a:fillRef>
+          <a:effectRef idx="2">
+            <a:schemeClr val="accent1"/>
+          </a:effectRef>
+          <a:fontRef idx="minor">
+            <a:schemeClr val="lt1"/>
+          </a:fontRef>
+        </p:style>
+        <p:txBody>
+          <a:bodyPr rtlCol="0" anchor="ctr"/>
+          <a:lstStyle/>
+          <a:p>
+            <a:pPr algn="ctr"/>
+          </a:p>
+        </p:txBody>
+      </p:sp>
+      <p:sp>
+        <p:nvSpPr>
+          <p:cNvPr id="30" name="TextBox 29"/>
+          <p:cNvSpPr txBox="1"/>
+          <p:nvPr/>
+        </p:nvSpPr>
+        <p:spPr>
+          <a:xfrm>
+            <a:off x="1295400" y="6229350"/>
+            <a:ext cx="9601200" cy="381000"/>
+          </a:xfrm>
+          <a:prstGeom prst="rect">
+            <a:avLst/>
+          </a:prstGeom>
+          <a:noFill/>
+        </p:spPr>
+        <p:txBody>
+          <a:bodyPr wrap="square" anchor="ctr">
+            <a:spAutoFit/>
+          </a:bodyPr>
+          <a:lstStyle/>
+          <a:p>
+            <a:pPr algn="l">
+              <a:lnSpc>
+                <a:spcPct val="100000"/>
+              </a:lnSpc>
+            </a:pPr>
+            <a:r>
+              <a:rPr sz="1100" b="0">
+                <a:solidFill>
+                  <a:srgbClr val="475569"/>
+                </a:solidFill>
+                <a:latin typeface="PingFang SC"/>
+              </a:rPr>
+              <a:t>非相邻转移:streaming → cancelled</a:t>
+            </a:r>
+          </a:p>
+        </p:txBody>
+      </p:sp>
+      <p:sp>
+        <p:nvSpPr>
+          <p:cNvPr id="31" name="TextBox 30"/>
           <p:cNvSpPr txBox="1"/>
           <p:nvPr/>
         </p:nvSpPr>
@@ -6046,7 +6020,7 @@
       </p:sp>
       <p:sp>
         <p:nvSpPr>
-          <p:cNvPr id="33" name="TextBox 32"/>
+          <p:cNvPr id="32" name="TextBox 31"/>
           <p:cNvSpPr txBox="1"/>
           <p:nvPr/>
         </p:nvSpPr>
@@ -23929,7 +23903,7 @@
         <p:spPr>
           <a:xfrm>
             <a:off x="365760" y="762000"/>
-            <a:ext cx="11460480" cy="5144192"/>
+            <a:ext cx="11460480" cy="5339541"/>
           </a:xfrm>
           <a:prstGeom prst="rect">
             <a:avLst/>
